--- a/docs/GDP_Nowcasting_종합보고_1p_2026-07-10.pptx
+++ b/docs/GDP_Nowcasting_종합보고_1p_2026-07-10.pptx
@@ -5,9 +5,9 @@
     <p:sldMasterId id="2147483648" r:id="rId1"/>
   </p:sldMasterIdLst>
   <p:sldIdLst>
-    <p:sldId id="256" r:id="rId7"/>
+    <p:sldId id="256" r:id="rId2"/>
   </p:sldIdLst>
-  <p:sldSz cx="12191695" cy="6858000" type="screen4x3"/>
+  <p:sldSz cx="12192000" cy="6858000"/>
   <p:notesSz cx="6858000" cy="9144000"/>
   <p:defaultTextStyle>
     <a:defPPr>
@@ -104,6 +104,22 @@
       </a:defRPr>
     </a:lvl9pPr>
   </p:defaultTextStyle>
+  <p:extLst>
+    <p:ext uri="{EFAFB233-063F-42B5-8137-9DF3F51BA10A}">
+      <p15:sldGuideLst xmlns:p15="http://schemas.microsoft.com/office/powerpoint/2012/main">
+        <p15:guide id="1" orient="horz" pos="2160">
+          <p15:clr>
+            <a:srgbClr val="A4A3A4"/>
+          </p15:clr>
+        </p15:guide>
+        <p15:guide id="2" pos="2880">
+          <p15:clr>
+            <a:srgbClr val="A4A3A4"/>
+          </p15:clr>
+        </p15:guide>
+      </p15:sldGuideLst>
+    </p:ext>
+  </p:extLst>
 </p:presentation>
 </file>
 
@@ -145,10 +161,9 @@
           <a:lstStyle/>
           <a:p>
             <a:r>
-              <a:rPr lang="en-US" smtClean="0"/>
+              <a:rPr lang="en-US"/>
               <a:t>Click to edit Master title style</a:t>
             </a:r>
-            <a:endParaRPr lang="en-US"/>
           </a:p>
         </p:txBody>
       </p:sp>
@@ -264,10 +279,9 @@
           </a:lstStyle>
           <a:p>
             <a:r>
-              <a:rPr lang="en-US" smtClean="0"/>
+              <a:rPr lang="en-US"/>
               <a:t>Click to edit Master subtitle style</a:t>
             </a:r>
-            <a:endParaRPr lang="en-US"/>
           </a:p>
         </p:txBody>
       </p:sp>
@@ -288,7 +302,7 @@
           <a:p>
             <a:fld id="{5BCAD085-E8A6-8845-BD4E-CB4CCA059FC4}" type="datetimeFigureOut">
               <a:rPr lang="en-US" smtClean="0"/>
-              <a:t>1/27/13</a:t>
+              <a:t>7/14/26</a:t>
             </a:fld>
             <a:endParaRPr lang="en-US"/>
           </a:p>
@@ -382,10 +396,9 @@
           <a:lstStyle/>
           <a:p>
             <a:r>
-              <a:rPr lang="en-US" smtClean="0"/>
+              <a:rPr lang="en-US"/>
               <a:t>Click to edit Master title style</a:t>
             </a:r>
-            <a:endParaRPr lang="en-US"/>
           </a:p>
         </p:txBody>
       </p:sp>
@@ -406,38 +419,37 @@
           <a:p>
             <a:pPr lvl="0"/>
             <a:r>
-              <a:rPr lang="en-US" smtClean="0"/>
+              <a:rPr lang="en-US"/>
               <a:t>Click to edit Master text styles</a:t>
             </a:r>
           </a:p>
           <a:p>
             <a:pPr lvl="1"/>
             <a:r>
-              <a:rPr lang="en-US" smtClean="0"/>
+              <a:rPr lang="en-US"/>
               <a:t>Second level</a:t>
             </a:r>
           </a:p>
           <a:p>
             <a:pPr lvl="2"/>
             <a:r>
-              <a:rPr lang="en-US" smtClean="0"/>
+              <a:rPr lang="en-US"/>
               <a:t>Third level</a:t>
             </a:r>
           </a:p>
           <a:p>
             <a:pPr lvl="3"/>
             <a:r>
-              <a:rPr lang="en-US" smtClean="0"/>
+              <a:rPr lang="en-US"/>
               <a:t>Fourth level</a:t>
             </a:r>
           </a:p>
           <a:p>
             <a:pPr lvl="4"/>
             <a:r>
-              <a:rPr lang="en-US" smtClean="0"/>
+              <a:rPr lang="en-US"/>
               <a:t>Fifth level</a:t>
             </a:r>
-            <a:endParaRPr lang="en-US"/>
           </a:p>
         </p:txBody>
       </p:sp>
@@ -458,7 +470,7 @@
           <a:p>
             <a:fld id="{5BCAD085-E8A6-8845-BD4E-CB4CCA059FC4}" type="datetimeFigureOut">
               <a:rPr lang="en-US" smtClean="0"/>
-              <a:t>1/27/13</a:t>
+              <a:t>7/14/26</a:t>
             </a:fld>
             <a:endParaRPr lang="en-US"/>
           </a:p>
@@ -557,10 +569,9 @@
           <a:lstStyle/>
           <a:p>
             <a:r>
-              <a:rPr lang="en-US" smtClean="0"/>
+              <a:rPr lang="en-US"/>
               <a:t>Click to edit Master title style</a:t>
             </a:r>
-            <a:endParaRPr lang="en-US"/>
           </a:p>
         </p:txBody>
       </p:sp>
@@ -586,38 +597,37 @@
           <a:p>
             <a:pPr lvl="0"/>
             <a:r>
-              <a:rPr lang="en-US" smtClean="0"/>
+              <a:rPr lang="en-US"/>
               <a:t>Click to edit Master text styles</a:t>
             </a:r>
           </a:p>
           <a:p>
             <a:pPr lvl="1"/>
             <a:r>
-              <a:rPr lang="en-US" smtClean="0"/>
+              <a:rPr lang="en-US"/>
               <a:t>Second level</a:t>
             </a:r>
           </a:p>
           <a:p>
             <a:pPr lvl="2"/>
             <a:r>
-              <a:rPr lang="en-US" smtClean="0"/>
+              <a:rPr lang="en-US"/>
               <a:t>Third level</a:t>
             </a:r>
           </a:p>
           <a:p>
             <a:pPr lvl="3"/>
             <a:r>
-              <a:rPr lang="en-US" smtClean="0"/>
+              <a:rPr lang="en-US"/>
               <a:t>Fourth level</a:t>
             </a:r>
           </a:p>
           <a:p>
             <a:pPr lvl="4"/>
             <a:r>
-              <a:rPr lang="en-US" smtClean="0"/>
+              <a:rPr lang="en-US"/>
               <a:t>Fifth level</a:t>
             </a:r>
-            <a:endParaRPr lang="en-US"/>
           </a:p>
         </p:txBody>
       </p:sp>
@@ -638,7 +648,7 @@
           <a:p>
             <a:fld id="{5BCAD085-E8A6-8845-BD4E-CB4CCA059FC4}" type="datetimeFigureOut">
               <a:rPr lang="en-US" smtClean="0"/>
-              <a:t>1/27/13</a:t>
+              <a:t>7/14/26</a:t>
             </a:fld>
             <a:endParaRPr lang="en-US"/>
           </a:p>
@@ -732,10 +742,9 @@
           <a:lstStyle/>
           <a:p>
             <a:r>
-              <a:rPr lang="en-US" smtClean="0"/>
+              <a:rPr lang="en-US"/>
               <a:t>Click to edit Master title style</a:t>
             </a:r>
-            <a:endParaRPr lang="en-US"/>
           </a:p>
         </p:txBody>
       </p:sp>
@@ -756,38 +765,37 @@
           <a:p>
             <a:pPr lvl="0"/>
             <a:r>
-              <a:rPr lang="en-US" smtClean="0"/>
+              <a:rPr lang="en-US"/>
               <a:t>Click to edit Master text styles</a:t>
             </a:r>
           </a:p>
           <a:p>
             <a:pPr lvl="1"/>
             <a:r>
-              <a:rPr lang="en-US" smtClean="0"/>
+              <a:rPr lang="en-US"/>
               <a:t>Second level</a:t>
             </a:r>
           </a:p>
           <a:p>
             <a:pPr lvl="2"/>
             <a:r>
-              <a:rPr lang="en-US" smtClean="0"/>
+              <a:rPr lang="en-US"/>
               <a:t>Third level</a:t>
             </a:r>
           </a:p>
           <a:p>
             <a:pPr lvl="3"/>
             <a:r>
-              <a:rPr lang="en-US" smtClean="0"/>
+              <a:rPr lang="en-US"/>
               <a:t>Fourth level</a:t>
             </a:r>
           </a:p>
           <a:p>
             <a:pPr lvl="4"/>
             <a:r>
-              <a:rPr lang="en-US" smtClean="0"/>
+              <a:rPr lang="en-US"/>
               <a:t>Fifth level</a:t>
             </a:r>
-            <a:endParaRPr lang="en-US"/>
           </a:p>
         </p:txBody>
       </p:sp>
@@ -808,7 +816,7 @@
           <a:p>
             <a:fld id="{5BCAD085-E8A6-8845-BD4E-CB4CCA059FC4}" type="datetimeFigureOut">
               <a:rPr lang="en-US" smtClean="0"/>
-              <a:t>1/27/13</a:t>
+              <a:t>7/14/26</a:t>
             </a:fld>
             <a:endParaRPr lang="en-US"/>
           </a:p>
@@ -911,10 +919,9 @@
           </a:lstStyle>
           <a:p>
             <a:r>
-              <a:rPr lang="en-US" smtClean="0"/>
+              <a:rPr lang="en-US"/>
               <a:t>Click to edit Master title style</a:t>
             </a:r>
-            <a:endParaRPr lang="en-US"/>
           </a:p>
         </p:txBody>
       </p:sp>
@@ -1031,7 +1038,7 @@
           <a:p>
             <a:pPr lvl="0"/>
             <a:r>
-              <a:rPr lang="en-US" smtClean="0"/>
+              <a:rPr lang="en-US"/>
               <a:t>Click to edit Master text styles</a:t>
             </a:r>
           </a:p>
@@ -1054,7 +1061,7 @@
           <a:p>
             <a:fld id="{5BCAD085-E8A6-8845-BD4E-CB4CCA059FC4}" type="datetimeFigureOut">
               <a:rPr lang="en-US" smtClean="0"/>
-              <a:t>1/27/13</a:t>
+              <a:t>7/14/26</a:t>
             </a:fld>
             <a:endParaRPr lang="en-US"/>
           </a:p>
@@ -1148,10 +1155,9 @@
           <a:lstStyle/>
           <a:p>
             <a:r>
-              <a:rPr lang="en-US" smtClean="0"/>
+              <a:rPr lang="en-US"/>
               <a:t>Click to edit Master title style</a:t>
             </a:r>
-            <a:endParaRPr lang="en-US"/>
           </a:p>
         </p:txBody>
       </p:sp>
@@ -1205,38 +1211,37 @@
           <a:p>
             <a:pPr lvl="0"/>
             <a:r>
-              <a:rPr lang="en-US" smtClean="0"/>
+              <a:rPr lang="en-US"/>
               <a:t>Click to edit Master text styles</a:t>
             </a:r>
           </a:p>
           <a:p>
             <a:pPr lvl="1"/>
             <a:r>
-              <a:rPr lang="en-US" smtClean="0"/>
+              <a:rPr lang="en-US"/>
               <a:t>Second level</a:t>
             </a:r>
           </a:p>
           <a:p>
             <a:pPr lvl="2"/>
             <a:r>
-              <a:rPr lang="en-US" smtClean="0"/>
+              <a:rPr lang="en-US"/>
               <a:t>Third level</a:t>
             </a:r>
           </a:p>
           <a:p>
             <a:pPr lvl="3"/>
             <a:r>
-              <a:rPr lang="en-US" smtClean="0"/>
+              <a:rPr lang="en-US"/>
               <a:t>Fourth level</a:t>
             </a:r>
           </a:p>
           <a:p>
             <a:pPr lvl="4"/>
             <a:r>
-              <a:rPr lang="en-US" smtClean="0"/>
+              <a:rPr lang="en-US"/>
               <a:t>Fifth level</a:t>
             </a:r>
-            <a:endParaRPr lang="en-US"/>
           </a:p>
         </p:txBody>
       </p:sp>
@@ -1290,38 +1295,37 @@
           <a:p>
             <a:pPr lvl="0"/>
             <a:r>
-              <a:rPr lang="en-US" smtClean="0"/>
+              <a:rPr lang="en-US"/>
               <a:t>Click to edit Master text styles</a:t>
             </a:r>
           </a:p>
           <a:p>
             <a:pPr lvl="1"/>
             <a:r>
-              <a:rPr lang="en-US" smtClean="0"/>
+              <a:rPr lang="en-US"/>
               <a:t>Second level</a:t>
             </a:r>
           </a:p>
           <a:p>
             <a:pPr lvl="2"/>
             <a:r>
-              <a:rPr lang="en-US" smtClean="0"/>
+              <a:rPr lang="en-US"/>
               <a:t>Third level</a:t>
             </a:r>
           </a:p>
           <a:p>
             <a:pPr lvl="3"/>
             <a:r>
-              <a:rPr lang="en-US" smtClean="0"/>
+              <a:rPr lang="en-US"/>
               <a:t>Fourth level</a:t>
             </a:r>
           </a:p>
           <a:p>
             <a:pPr lvl="4"/>
             <a:r>
-              <a:rPr lang="en-US" smtClean="0"/>
+              <a:rPr lang="en-US"/>
               <a:t>Fifth level</a:t>
             </a:r>
-            <a:endParaRPr lang="en-US"/>
           </a:p>
         </p:txBody>
       </p:sp>
@@ -1342,7 +1346,7 @@
           <a:p>
             <a:fld id="{5BCAD085-E8A6-8845-BD4E-CB4CCA059FC4}" type="datetimeFigureOut">
               <a:rPr lang="en-US" smtClean="0"/>
-              <a:t>1/27/13</a:t>
+              <a:t>7/14/26</a:t>
             </a:fld>
             <a:endParaRPr lang="en-US"/>
           </a:p>
@@ -1440,10 +1444,9 @@
           </a:lstStyle>
           <a:p>
             <a:r>
-              <a:rPr lang="en-US" smtClean="0"/>
+              <a:rPr lang="en-US"/>
               <a:t>Click to edit Master title style</a:t>
             </a:r>
-            <a:endParaRPr lang="en-US"/>
           </a:p>
         </p:txBody>
       </p:sp>
@@ -1506,7 +1509,7 @@
           <a:p>
             <a:pPr lvl="0"/>
             <a:r>
-              <a:rPr lang="en-US" smtClean="0"/>
+              <a:rPr lang="en-US"/>
               <a:t>Click to edit Master text styles</a:t>
             </a:r>
           </a:p>
@@ -1562,38 +1565,37 @@
           <a:p>
             <a:pPr lvl="0"/>
             <a:r>
-              <a:rPr lang="en-US" smtClean="0"/>
+              <a:rPr lang="en-US"/>
               <a:t>Click to edit Master text styles</a:t>
             </a:r>
           </a:p>
           <a:p>
             <a:pPr lvl="1"/>
             <a:r>
-              <a:rPr lang="en-US" smtClean="0"/>
+              <a:rPr lang="en-US"/>
               <a:t>Second level</a:t>
             </a:r>
           </a:p>
           <a:p>
             <a:pPr lvl="2"/>
             <a:r>
-              <a:rPr lang="en-US" smtClean="0"/>
+              <a:rPr lang="en-US"/>
               <a:t>Third level</a:t>
             </a:r>
           </a:p>
           <a:p>
             <a:pPr lvl="3"/>
             <a:r>
-              <a:rPr lang="en-US" smtClean="0"/>
+              <a:rPr lang="en-US"/>
               <a:t>Fourth level</a:t>
             </a:r>
           </a:p>
           <a:p>
             <a:pPr lvl="4"/>
             <a:r>
-              <a:rPr lang="en-US" smtClean="0"/>
+              <a:rPr lang="en-US"/>
               <a:t>Fifth level</a:t>
             </a:r>
-            <a:endParaRPr lang="en-US"/>
           </a:p>
         </p:txBody>
       </p:sp>
@@ -1656,7 +1658,7 @@
           <a:p>
             <a:pPr lvl="0"/>
             <a:r>
-              <a:rPr lang="en-US" smtClean="0"/>
+              <a:rPr lang="en-US"/>
               <a:t>Click to edit Master text styles</a:t>
             </a:r>
           </a:p>
@@ -1712,38 +1714,37 @@
           <a:p>
             <a:pPr lvl="0"/>
             <a:r>
-              <a:rPr lang="en-US" smtClean="0"/>
+              <a:rPr lang="en-US"/>
               <a:t>Click to edit Master text styles</a:t>
             </a:r>
           </a:p>
           <a:p>
             <a:pPr lvl="1"/>
             <a:r>
-              <a:rPr lang="en-US" smtClean="0"/>
+              <a:rPr lang="en-US"/>
               <a:t>Second level</a:t>
             </a:r>
           </a:p>
           <a:p>
             <a:pPr lvl="2"/>
             <a:r>
-              <a:rPr lang="en-US" smtClean="0"/>
+              <a:rPr lang="en-US"/>
               <a:t>Third level</a:t>
             </a:r>
           </a:p>
           <a:p>
             <a:pPr lvl="3"/>
             <a:r>
-              <a:rPr lang="en-US" smtClean="0"/>
+              <a:rPr lang="en-US"/>
               <a:t>Fourth level</a:t>
             </a:r>
           </a:p>
           <a:p>
             <a:pPr lvl="4"/>
             <a:r>
-              <a:rPr lang="en-US" smtClean="0"/>
+              <a:rPr lang="en-US"/>
               <a:t>Fifth level</a:t>
             </a:r>
-            <a:endParaRPr lang="en-US"/>
           </a:p>
         </p:txBody>
       </p:sp>
@@ -1764,7 +1765,7 @@
           <a:p>
             <a:fld id="{5BCAD085-E8A6-8845-BD4E-CB4CCA059FC4}" type="datetimeFigureOut">
               <a:rPr lang="en-US" smtClean="0"/>
-              <a:t>1/27/13</a:t>
+              <a:t>7/14/26</a:t>
             </a:fld>
             <a:endParaRPr lang="en-US"/>
           </a:p>
@@ -1858,10 +1859,9 @@
           <a:lstStyle/>
           <a:p>
             <a:r>
-              <a:rPr lang="en-US" smtClean="0"/>
+              <a:rPr lang="en-US"/>
               <a:t>Click to edit Master title style</a:t>
             </a:r>
-            <a:endParaRPr lang="en-US"/>
           </a:p>
         </p:txBody>
       </p:sp>
@@ -1882,7 +1882,7 @@
           <a:p>
             <a:fld id="{5BCAD085-E8A6-8845-BD4E-CB4CCA059FC4}" type="datetimeFigureOut">
               <a:rPr lang="en-US" smtClean="0"/>
-              <a:t>1/27/13</a:t>
+              <a:t>7/14/26</a:t>
             </a:fld>
             <a:endParaRPr lang="en-US"/>
           </a:p>
@@ -1977,7 +1977,7 @@
           <a:p>
             <a:fld id="{5BCAD085-E8A6-8845-BD4E-CB4CCA059FC4}" type="datetimeFigureOut">
               <a:rPr lang="en-US" smtClean="0"/>
-              <a:t>1/27/13</a:t>
+              <a:t>7/14/26</a:t>
             </a:fld>
             <a:endParaRPr lang="en-US"/>
           </a:p>
@@ -2080,10 +2080,9 @@
           </a:lstStyle>
           <a:p>
             <a:r>
-              <a:rPr lang="en-US" smtClean="0"/>
+              <a:rPr lang="en-US"/>
               <a:t>Click to edit Master title style</a:t>
             </a:r>
-            <a:endParaRPr lang="en-US"/>
           </a:p>
         </p:txBody>
       </p:sp>
@@ -2137,38 +2136,37 @@
           <a:p>
             <a:pPr lvl="0"/>
             <a:r>
-              <a:rPr lang="en-US" smtClean="0"/>
+              <a:rPr lang="en-US"/>
               <a:t>Click to edit Master text styles</a:t>
             </a:r>
           </a:p>
           <a:p>
             <a:pPr lvl="1"/>
             <a:r>
-              <a:rPr lang="en-US" smtClean="0"/>
+              <a:rPr lang="en-US"/>
               <a:t>Second level</a:t>
             </a:r>
           </a:p>
           <a:p>
             <a:pPr lvl="2"/>
             <a:r>
-              <a:rPr lang="en-US" smtClean="0"/>
+              <a:rPr lang="en-US"/>
               <a:t>Third level</a:t>
             </a:r>
           </a:p>
           <a:p>
             <a:pPr lvl="3"/>
             <a:r>
-              <a:rPr lang="en-US" smtClean="0"/>
+              <a:rPr lang="en-US"/>
               <a:t>Fourth level</a:t>
             </a:r>
           </a:p>
           <a:p>
             <a:pPr lvl="4"/>
             <a:r>
-              <a:rPr lang="en-US" smtClean="0"/>
+              <a:rPr lang="en-US"/>
               <a:t>Fifth level</a:t>
             </a:r>
-            <a:endParaRPr lang="en-US"/>
           </a:p>
         </p:txBody>
       </p:sp>
@@ -2231,7 +2229,7 @@
           <a:p>
             <a:pPr lvl="0"/>
             <a:r>
-              <a:rPr lang="en-US" smtClean="0"/>
+              <a:rPr lang="en-US"/>
               <a:t>Click to edit Master text styles</a:t>
             </a:r>
           </a:p>
@@ -2254,7 +2252,7 @@
           <a:p>
             <a:fld id="{5BCAD085-E8A6-8845-BD4E-CB4CCA059FC4}" type="datetimeFigureOut">
               <a:rPr lang="en-US" smtClean="0"/>
-              <a:t>1/27/13</a:t>
+              <a:t>7/14/26</a:t>
             </a:fld>
             <a:endParaRPr lang="en-US"/>
           </a:p>
@@ -2357,10 +2355,9 @@
           </a:lstStyle>
           <a:p>
             <a:r>
-              <a:rPr lang="en-US" smtClean="0"/>
+              <a:rPr lang="en-US"/>
               <a:t>Click to edit Master title style</a:t>
             </a:r>
-            <a:endParaRPr lang="en-US"/>
           </a:p>
         </p:txBody>
       </p:sp>
@@ -2484,7 +2481,7 @@
           <a:p>
             <a:pPr lvl="0"/>
             <a:r>
-              <a:rPr lang="en-US" smtClean="0"/>
+              <a:rPr lang="en-US"/>
               <a:t>Click to edit Master text styles</a:t>
             </a:r>
           </a:p>
@@ -2507,7 +2504,7 @@
           <a:p>
             <a:fld id="{5BCAD085-E8A6-8845-BD4E-CB4CCA059FC4}" type="datetimeFigureOut">
               <a:rPr lang="en-US" smtClean="0"/>
-              <a:t>1/27/13</a:t>
+              <a:t>7/14/26</a:t>
             </a:fld>
             <a:endParaRPr lang="en-US"/>
           </a:p>
@@ -2616,10 +2613,9 @@
           <a:lstStyle/>
           <a:p>
             <a:r>
-              <a:rPr lang="en-US" smtClean="0"/>
+              <a:rPr lang="en-US"/>
               <a:t>Click to edit Master title style</a:t>
             </a:r>
-            <a:endParaRPr lang="en-US"/>
           </a:p>
         </p:txBody>
       </p:sp>
@@ -2650,38 +2646,37 @@
           <a:p>
             <a:pPr lvl="0"/>
             <a:r>
-              <a:rPr lang="en-US" smtClean="0"/>
+              <a:rPr lang="en-US"/>
               <a:t>Click to edit Master text styles</a:t>
             </a:r>
           </a:p>
           <a:p>
             <a:pPr lvl="1"/>
             <a:r>
-              <a:rPr lang="en-US" smtClean="0"/>
+              <a:rPr lang="en-US"/>
               <a:t>Second level</a:t>
             </a:r>
           </a:p>
           <a:p>
             <a:pPr lvl="2"/>
             <a:r>
-              <a:rPr lang="en-US" smtClean="0"/>
+              <a:rPr lang="en-US"/>
               <a:t>Third level</a:t>
             </a:r>
           </a:p>
           <a:p>
             <a:pPr lvl="3"/>
             <a:r>
-              <a:rPr lang="en-US" smtClean="0"/>
+              <a:rPr lang="en-US"/>
               <a:t>Fourth level</a:t>
             </a:r>
           </a:p>
           <a:p>
             <a:pPr lvl="4"/>
             <a:r>
-              <a:rPr lang="en-US" smtClean="0"/>
+              <a:rPr lang="en-US"/>
               <a:t>Fifth level</a:t>
             </a:r>
-            <a:endParaRPr lang="en-US"/>
           </a:p>
         </p:txBody>
       </p:sp>
@@ -2720,7 +2715,7 @@
           <a:p>
             <a:fld id="{5BCAD085-E8A6-8845-BD4E-CB4CCA059FC4}" type="datetimeFigureOut">
               <a:rPr lang="en-US" smtClean="0"/>
-              <a:t>1/27/13</a:t>
+              <a:t>7/14/26</a:t>
             </a:fld>
             <a:endParaRPr lang="en-US"/>
           </a:p>
@@ -3079,7 +3074,7 @@
 </file>
 
 <file path=ppt/slides/slide1.xml><?xml version="1.0" encoding="utf-8"?>
-<p:sld xmlns:a="http://schemas.openxmlformats.org/drawingml/2006/main" xmlns:p="http://schemas.openxmlformats.org/presentationml/2006/main" xmlns:r="http://schemas.openxmlformats.org/officeDocument/2006/relationships">
+<p:sld xmlns:a="http://schemas.openxmlformats.org/drawingml/2006/main" xmlns:r="http://schemas.openxmlformats.org/officeDocument/2006/relationships" xmlns:p="http://schemas.openxmlformats.org/presentationml/2006/main">
   <p:cSld>
     <p:spTree>
       <p:nvGrpSpPr>
@@ -3087,7 +3082,14 @@
         <p:cNvGrpSpPr/>
         <p:nvPr/>
       </p:nvGrpSpPr>
-      <p:grpSpPr/>
+      <p:grpSpPr>
+        <a:xfrm>
+          <a:off x="0" y="0"/>
+          <a:ext cx="0" cy="0"/>
+          <a:chOff x="0" y="0"/>
+          <a:chExt cx="0" cy="0"/>
+        </a:xfrm>
+      </p:grpSpPr>
       <p:sp>
         <p:nvSpPr>
           <p:cNvPr id="2" name="TextBox 1"/>
@@ -3097,7 +3099,7 @@
         <p:spPr>
           <a:xfrm>
             <a:off x="502920" y="237744"/>
-            <a:ext cx="9601200" cy="502920"/>
+            <a:ext cx="9601200" cy="390876"/>
           </a:xfrm>
           <a:prstGeom prst="rect">
             <a:avLst/>
@@ -3105,7 +3107,7 @@
           <a:noFill/>
         </p:spPr>
         <p:txBody>
-          <a:bodyPr wrap="square" anchor="t" lIns="45720" rIns="45720" tIns="18288" bIns="18288">
+          <a:bodyPr wrap="square" lIns="45720" tIns="18288" rIns="45720" bIns="18288" anchor="t">
             <a:spAutoFit/>
           </a:bodyPr>
           <a:lstStyle/>
@@ -3116,15 +3118,92 @@
               </a:spcAft>
             </a:pPr>
             <a:r>
-              <a:rPr sz="2300" b="1">
+              <a:rPr sz="2300" b="1" dirty="0">
                 <a:solidFill>
                   <a:srgbClr val="243447"/>
                 </a:solidFill>
-                <a:latin typeface="Apple SD Gothic Neo"/>
-                <a:ea typeface="Apple SD Gothic Neo"/>
-              </a:rPr>
-              <a:t>GDP Nowcasting 고도화 — 종합 결과 보고</a:t>
-            </a:r>
+                <a:latin typeface="NanumSquare Neo Bold" pitchFamily="2" charset="-127"/>
+                <a:ea typeface="NanumSquare Neo Bold" pitchFamily="2" charset="-127"/>
+              </a:rPr>
+              <a:t>GDP Nowcasting </a:t>
+            </a:r>
+            <a:r>
+              <a:rPr sz="2300" b="1" dirty="0" err="1">
+                <a:solidFill>
+                  <a:srgbClr val="243447"/>
+                </a:solidFill>
+                <a:latin typeface="NanumSquare Neo Bold" pitchFamily="2" charset="-127"/>
+                <a:ea typeface="NanumSquare Neo Bold" pitchFamily="2" charset="-127"/>
+              </a:rPr>
+              <a:t>고도화</a:t>
+            </a:r>
+            <a:r>
+              <a:rPr sz="2300" b="1" dirty="0">
+                <a:solidFill>
+                  <a:srgbClr val="243447"/>
+                </a:solidFill>
+                <a:latin typeface="NanumSquare Neo Bold" pitchFamily="2" charset="-127"/>
+                <a:ea typeface="NanumSquare Neo Bold" pitchFamily="2" charset="-127"/>
+              </a:rPr>
+              <a:t> — </a:t>
+            </a:r>
+            <a:r>
+              <a:rPr sz="2300" b="1" dirty="0" err="1">
+                <a:solidFill>
+                  <a:srgbClr val="243447"/>
+                </a:solidFill>
+                <a:latin typeface="NanumSquare Neo Bold" pitchFamily="2" charset="-127"/>
+                <a:ea typeface="NanumSquare Neo Bold" pitchFamily="2" charset="-127"/>
+              </a:rPr>
+              <a:t>종합</a:t>
+            </a:r>
+            <a:r>
+              <a:rPr sz="2300" b="1" dirty="0">
+                <a:solidFill>
+                  <a:srgbClr val="243447"/>
+                </a:solidFill>
+                <a:latin typeface="NanumSquare Neo Bold" pitchFamily="2" charset="-127"/>
+                <a:ea typeface="NanumSquare Neo Bold" pitchFamily="2" charset="-127"/>
+              </a:rPr>
+              <a:t> </a:t>
+            </a:r>
+            <a:r>
+              <a:rPr sz="2300" b="1" dirty="0" err="1">
+                <a:solidFill>
+                  <a:srgbClr val="243447"/>
+                </a:solidFill>
+                <a:latin typeface="NanumSquare Neo Bold" pitchFamily="2" charset="-127"/>
+                <a:ea typeface="NanumSquare Neo Bold" pitchFamily="2" charset="-127"/>
+              </a:rPr>
+              <a:t>결과</a:t>
+            </a:r>
+            <a:r>
+              <a:rPr sz="2300" b="1" dirty="0">
+                <a:solidFill>
+                  <a:srgbClr val="243447"/>
+                </a:solidFill>
+                <a:latin typeface="NanumSquare Neo Bold" pitchFamily="2" charset="-127"/>
+                <a:ea typeface="NanumSquare Neo Bold" pitchFamily="2" charset="-127"/>
+              </a:rPr>
+              <a:t> </a:t>
+            </a:r>
+            <a:r>
+              <a:rPr sz="2300" b="1" dirty="0" err="1">
+                <a:solidFill>
+                  <a:srgbClr val="243447"/>
+                </a:solidFill>
+                <a:latin typeface="NanumSquare Neo Bold" pitchFamily="2" charset="-127"/>
+                <a:ea typeface="NanumSquare Neo Bold" pitchFamily="2" charset="-127"/>
+              </a:rPr>
+              <a:t>보고</a:t>
+            </a:r>
+            <a:endParaRPr sz="2300" b="1" dirty="0">
+              <a:solidFill>
+                <a:srgbClr val="243447"/>
+              </a:solidFill>
+              <a:latin typeface="NanumSquare Neo Bold" pitchFamily="2" charset="-127"/>
+              <a:ea typeface="NanumSquare Neo Bold" pitchFamily="2" charset="-127"/>
+            </a:endParaRPr>
           </a:p>
         </p:txBody>
       </p:sp>
@@ -3137,7 +3216,7 @@
         <p:spPr>
           <a:xfrm>
             <a:off x="9692640" y="329184"/>
-            <a:ext cx="2011680" cy="365760"/>
+            <a:ext cx="2011680" cy="198516"/>
           </a:xfrm>
           <a:prstGeom prst="rect">
             <a:avLst/>
@@ -3145,7 +3224,7 @@
           <a:noFill/>
         </p:spPr>
         <p:txBody>
-          <a:bodyPr wrap="square" anchor="t" lIns="45720" rIns="45720" tIns="18288" bIns="18288">
+          <a:bodyPr wrap="square" lIns="45720" tIns="18288" rIns="45720" bIns="18288" anchor="t">
             <a:spAutoFit/>
           </a:bodyPr>
           <a:lstStyle/>
@@ -3160,8 +3239,8 @@
                 <a:solidFill>
                   <a:srgbClr val="6B6B6B"/>
                 </a:solidFill>
-                <a:latin typeface="Apple SD Gothic Neo"/>
-                <a:ea typeface="Apple SD Gothic Neo"/>
+                <a:latin typeface="NanumSquare Neo Regular" pitchFamily="2" charset="-127"/>
+                <a:ea typeface="NanumSquare Neo Regular" pitchFamily="2" charset="-127"/>
               </a:rPr>
               <a:t>AX Lab | 2026. 07.</a:t>
             </a:r>
@@ -3212,7 +3291,7 @@
         <p:spPr>
           <a:xfrm>
             <a:off x="502920" y="877824"/>
-            <a:ext cx="11155680" cy="402336"/>
+            <a:ext cx="11155680" cy="221599"/>
           </a:xfrm>
           <a:prstGeom prst="rect">
             <a:avLst/>
@@ -3220,7 +3299,7 @@
           <a:noFill/>
         </p:spPr>
         <p:txBody>
-          <a:bodyPr wrap="square" anchor="t" lIns="45720" rIns="45720" tIns="18288" bIns="18288">
+          <a:bodyPr wrap="square" lIns="45720" tIns="18288" rIns="45720" bIns="18288" anchor="t">
             <a:spAutoFit/>
           </a:bodyPr>
           <a:lstStyle/>
@@ -3235,8 +3314,8 @@
                 <a:solidFill>
                   <a:srgbClr val="262626"/>
                 </a:solidFill>
-                <a:latin typeface="Apple SD Gothic Neo"/>
-                <a:ea typeface="Apple SD Gothic Neo"/>
+                <a:latin typeface="NanumSquare Neo Regular" pitchFamily="2" charset="-127"/>
+                <a:ea typeface="NanumSquare Neo Regular" pitchFamily="2" charset="-127"/>
               </a:rPr>
               <a:t>기존 전망체계 재현 → 국면전환 게이트 → 딥러닝 결합(v3)으로 </a:t>
             </a:r>
@@ -3245,8 +3324,8 @@
                 <a:solidFill>
                   <a:srgbClr val="008A3E"/>
                 </a:solidFill>
-                <a:latin typeface="Apple SD Gothic Neo"/>
-                <a:ea typeface="Apple SD Gothic Neo"/>
+                <a:latin typeface="NanumSquare Neo Regular" pitchFamily="2" charset="-127"/>
+                <a:ea typeface="NanumSquare Neo Regular" pitchFamily="2" charset="-127"/>
               </a:rPr>
               <a:t>기존 최고 대비 오차 −6.2% (0.765→0.718)</a:t>
             </a:r>
@@ -3255,8 +3334,8 @@
                 <a:solidFill>
                   <a:srgbClr val="6B6B6B"/>
                 </a:solidFill>
-                <a:latin typeface="Apple SD Gothic Neo"/>
-                <a:ea typeface="Apple SD Gothic Neo"/>
+                <a:latin typeface="NanumSquare Neo Regular" pitchFamily="2" charset="-127"/>
+                <a:ea typeface="NanumSquare Neo Regular" pitchFamily="2" charset="-127"/>
               </a:rPr>
               <a:t>   모든 결과는 실시간 빈티지·동일 검증체계 기준</a:t>
             </a:r>
@@ -3272,7 +3351,7 @@
         <p:spPr>
           <a:xfrm>
             <a:off x="502920" y="1417320"/>
-            <a:ext cx="3520440" cy="310896"/>
+            <a:ext cx="3520440" cy="236988"/>
           </a:xfrm>
           <a:prstGeom prst="rect">
             <a:avLst/>
@@ -3280,7 +3359,7 @@
           <a:noFill/>
         </p:spPr>
         <p:txBody>
-          <a:bodyPr wrap="square" anchor="t" lIns="45720" rIns="45720" tIns="18288" bIns="18288">
+          <a:bodyPr wrap="square" lIns="45720" tIns="18288" rIns="45720" bIns="18288" anchor="t">
             <a:spAutoFit/>
           </a:bodyPr>
           <a:lstStyle/>
@@ -3295,8 +3374,8 @@
                 <a:solidFill>
                   <a:srgbClr val="008A3E"/>
                 </a:solidFill>
-                <a:latin typeface="Apple SD Gothic Neo"/>
-                <a:ea typeface="Apple SD Gothic Neo"/>
+                <a:latin typeface="NanumSquare Neo Regular" pitchFamily="2" charset="-127"/>
+                <a:ea typeface="NanumSquare Neo Regular" pitchFamily="2" charset="-127"/>
               </a:rPr>
               <a:t>01  </a:t>
             </a:r>
@@ -3305,8 +3384,8 @@
                 <a:solidFill>
                   <a:srgbClr val="243447"/>
                 </a:solidFill>
-                <a:latin typeface="Apple SD Gothic Neo"/>
-                <a:ea typeface="Apple SD Gothic Neo"/>
+                <a:latin typeface="NanumSquare Neo Regular" pitchFamily="2" charset="-127"/>
+                <a:ea typeface="NanumSquare Neo Regular" pitchFamily="2" charset="-127"/>
               </a:rPr>
               <a:t>제안 구조 — 국면전환 게이트 v3</a:t>
             </a:r>
@@ -3357,7 +3436,7 @@
         <p:spPr>
           <a:xfrm>
             <a:off x="502920" y="1837944"/>
-            <a:ext cx="3520440" cy="658368"/>
+            <a:ext cx="3520440" cy="354969"/>
           </a:xfrm>
           <a:prstGeom prst="rect">
             <a:avLst/>
@@ -3365,7 +3444,7 @@
           <a:noFill/>
         </p:spPr>
         <p:txBody>
-          <a:bodyPr wrap="square" anchor="t" lIns="45720" rIns="45720" tIns="18288" bIns="18288">
+          <a:bodyPr wrap="square" lIns="45720" tIns="18288" rIns="45720" bIns="18288" anchor="t">
             <a:spAutoFit/>
           </a:bodyPr>
           <a:lstStyle/>
@@ -3380,8 +3459,8 @@
                 <a:solidFill>
                   <a:srgbClr val="262626"/>
                 </a:solidFill>
-                <a:latin typeface="Apple SD Gothic Neo"/>
-                <a:ea typeface="Apple SD Gothic Neo"/>
+                <a:latin typeface="NanumSquare Neo Regular" pitchFamily="2" charset="-127"/>
+                <a:ea typeface="NanumSquare Neo Regular" pitchFamily="2" charset="-127"/>
               </a:rPr>
               <a:t>매 분기, 이미 발표된 실적·심리지표만으로 국면을 판정한 뒤</a:t>
             </a:r>
@@ -3397,8 +3476,8 @@
                 <a:solidFill>
                   <a:srgbClr val="262626"/>
                 </a:solidFill>
-                <a:latin typeface="Apple SD Gothic Neo"/>
-                <a:ea typeface="Apple SD Gothic Neo"/>
+                <a:latin typeface="NanumSquare Neo Regular" pitchFamily="2" charset="-127"/>
+                <a:ea typeface="NanumSquare Neo Regular" pitchFamily="2" charset="-127"/>
               </a:rPr>
               <a:t>국면별 최적 조합으로 자동 전환 (미래정보 미사용)</a:t>
             </a:r>
@@ -3448,6 +3527,10 @@
           <a:lstStyle/>
           <a:p>
             <a:pPr algn="ctr"/>
+            <a:endParaRPr>
+              <a:latin typeface="NanumSquare Neo Regular" pitchFamily="2" charset="-127"/>
+              <a:ea typeface="NanumSquare Neo Regular" pitchFamily="2" charset="-127"/>
+            </a:endParaRPr>
           </a:p>
         </p:txBody>
       </p:sp>
@@ -3459,8 +3542,8 @@
         </p:nvSpPr>
         <p:spPr>
           <a:xfrm>
-            <a:off x="539496" y="2679192"/>
-            <a:ext cx="822960" cy="274320"/>
+            <a:off x="539496" y="2711466"/>
+            <a:ext cx="822960" cy="198516"/>
           </a:xfrm>
           <a:prstGeom prst="rect">
             <a:avLst/>
@@ -3468,7 +3551,7 @@
           <a:noFill/>
         </p:spPr>
         <p:txBody>
-          <a:bodyPr wrap="square" anchor="t" lIns="45720" rIns="45720" tIns="18288" bIns="18288">
+          <a:bodyPr wrap="square" lIns="45720" tIns="18288" rIns="45720" bIns="18288" anchor="t">
             <a:spAutoFit/>
           </a:bodyPr>
           <a:lstStyle/>
@@ -3479,15 +3562,22 @@
               </a:spcAft>
             </a:pPr>
             <a:r>
-              <a:rPr sz="1050" b="1">
+              <a:rPr sz="1050" b="1" dirty="0" err="1">
                 <a:solidFill>
                   <a:srgbClr val="243447"/>
                 </a:solidFill>
-                <a:latin typeface="Apple SD Gothic Neo"/>
-                <a:ea typeface="Apple SD Gothic Neo"/>
+                <a:latin typeface="NanumSquare Neo Regular" pitchFamily="2" charset="-127"/>
+                <a:ea typeface="NanumSquare Neo Regular" pitchFamily="2" charset="-127"/>
               </a:rPr>
               <a:t>충격기</a:t>
             </a:r>
+            <a:endParaRPr sz="1050" b="1" dirty="0">
+              <a:solidFill>
+                <a:srgbClr val="243447"/>
+              </a:solidFill>
+              <a:latin typeface="NanumSquare Neo Regular" pitchFamily="2" charset="-127"/>
+              <a:ea typeface="NanumSquare Neo Regular" pitchFamily="2" charset="-127"/>
+            </a:endParaRPr>
           </a:p>
         </p:txBody>
       </p:sp>
@@ -3500,7 +3590,7 @@
         <p:spPr>
           <a:xfrm>
             <a:off x="1435608" y="2560320"/>
-            <a:ext cx="2587752" cy="548640"/>
+            <a:ext cx="2587752" cy="351891"/>
           </a:xfrm>
           <a:prstGeom prst="rect">
             <a:avLst/>
@@ -3508,7 +3598,7 @@
           <a:noFill/>
         </p:spPr>
         <p:txBody>
-          <a:bodyPr wrap="square" anchor="t" lIns="45720" rIns="45720" tIns="18288" bIns="18288">
+          <a:bodyPr wrap="square" lIns="45720" tIns="18288" rIns="45720" bIns="18288" anchor="t">
             <a:spAutoFit/>
           </a:bodyPr>
           <a:lstStyle/>
@@ -3523,8 +3613,8 @@
                 <a:solidFill>
                   <a:srgbClr val="6B6B6B"/>
                 </a:solidFill>
-                <a:latin typeface="Apple SD Gothic Neo"/>
-                <a:ea typeface="Apple SD Gothic Neo"/>
+                <a:latin typeface="NanumSquare Neo Regular" pitchFamily="2" charset="-127"/>
+                <a:ea typeface="NanumSquare Neo Regular" pitchFamily="2" charset="-127"/>
               </a:rPr>
               <a:t>직전 4분기 변동성 &gt; 평소 중앙값</a:t>
             </a:r>
@@ -3540,8 +3630,8 @@
                 <a:solidFill>
                   <a:srgbClr val="262626"/>
                 </a:solidFill>
-                <a:latin typeface="Apple SD Gothic Neo"/>
-                <a:ea typeface="Apple SD Gothic Neo"/>
+                <a:latin typeface="NanumSquare Neo Regular" pitchFamily="2" charset="-127"/>
+                <a:ea typeface="NanumSquare Neo Regular" pitchFamily="2" charset="-127"/>
               </a:rPr>
               <a:t>DFM + XGBoost</a:t>
             </a:r>
@@ -3591,6 +3681,10 @@
           <a:lstStyle/>
           <a:p>
             <a:pPr algn="ctr"/>
+            <a:endParaRPr>
+              <a:latin typeface="NanumSquare Neo Regular" pitchFamily="2" charset="-127"/>
+              <a:ea typeface="NanumSquare Neo Regular" pitchFamily="2" charset="-127"/>
+            </a:endParaRPr>
           </a:p>
         </p:txBody>
       </p:sp>
@@ -3602,8 +3696,8 @@
         </p:nvSpPr>
         <p:spPr>
           <a:xfrm>
-            <a:off x="539496" y="3337560"/>
-            <a:ext cx="822960" cy="274320"/>
+            <a:off x="539496" y="3369834"/>
+            <a:ext cx="822960" cy="198516"/>
           </a:xfrm>
           <a:prstGeom prst="rect">
             <a:avLst/>
@@ -3611,7 +3705,7 @@
           <a:noFill/>
         </p:spPr>
         <p:txBody>
-          <a:bodyPr wrap="square" anchor="t" lIns="45720" rIns="45720" tIns="18288" bIns="18288">
+          <a:bodyPr wrap="square" lIns="45720" tIns="18288" rIns="45720" bIns="18288" anchor="t">
             <a:spAutoFit/>
           </a:bodyPr>
           <a:lstStyle/>
@@ -3626,8 +3720,8 @@
                 <a:solidFill>
                   <a:srgbClr val="243447"/>
                 </a:solidFill>
-                <a:latin typeface="Apple SD Gothic Neo"/>
-                <a:ea typeface="Apple SD Gothic Neo"/>
+                <a:latin typeface="NanumSquare Neo Regular" pitchFamily="2" charset="-127"/>
+                <a:ea typeface="NanumSquare Neo Regular" pitchFamily="2" charset="-127"/>
               </a:rPr>
               <a:t>평온기</a:t>
             </a:r>
@@ -3643,7 +3737,7 @@
         <p:spPr>
           <a:xfrm>
             <a:off x="1435608" y="3218688"/>
-            <a:ext cx="2587752" cy="548640"/>
+            <a:ext cx="2587752" cy="351891"/>
           </a:xfrm>
           <a:prstGeom prst="rect">
             <a:avLst/>
@@ -3651,7 +3745,7 @@
           <a:noFill/>
         </p:spPr>
         <p:txBody>
-          <a:bodyPr wrap="square" anchor="t" lIns="45720" rIns="45720" tIns="18288" bIns="18288">
+          <a:bodyPr wrap="square" lIns="45720" tIns="18288" rIns="45720" bIns="18288" anchor="t">
             <a:spAutoFit/>
           </a:bodyPr>
           <a:lstStyle/>
@@ -3666,8 +3760,8 @@
                 <a:solidFill>
                   <a:srgbClr val="6B6B6B"/>
                 </a:solidFill>
-                <a:latin typeface="Apple SD Gothic Neo"/>
-                <a:ea typeface="Apple SD Gothic Neo"/>
+                <a:latin typeface="NanumSquare Neo Regular" pitchFamily="2" charset="-127"/>
+                <a:ea typeface="NanumSquare Neo Regular" pitchFamily="2" charset="-127"/>
               </a:rPr>
               <a:t>그 외 안정 구간</a:t>
             </a:r>
@@ -3683,8 +3777,8 @@
                 <a:solidFill>
                   <a:srgbClr val="262626"/>
                 </a:solidFill>
-                <a:latin typeface="Apple SD Gothic Neo"/>
-                <a:ea typeface="Apple SD Gothic Neo"/>
+                <a:latin typeface="NanumSquare Neo Regular" pitchFamily="2" charset="-127"/>
+                <a:ea typeface="NanumSquare Neo Regular" pitchFamily="2" charset="-127"/>
               </a:rPr>
               <a:t>DFM + RF</a:t>
             </a:r>
@@ -3734,6 +3828,10 @@
           <a:lstStyle/>
           <a:p>
             <a:pPr algn="ctr"/>
+            <a:endParaRPr>
+              <a:latin typeface="NanumSquare Neo Regular" pitchFamily="2" charset="-127"/>
+              <a:ea typeface="NanumSquare Neo Regular" pitchFamily="2" charset="-127"/>
+            </a:endParaRPr>
           </a:p>
         </p:txBody>
       </p:sp>
@@ -3745,8 +3843,8 @@
         </p:nvSpPr>
         <p:spPr>
           <a:xfrm>
-            <a:off x="539496" y="3995928"/>
-            <a:ext cx="822960" cy="274320"/>
+            <a:off x="539496" y="4028202"/>
+            <a:ext cx="822960" cy="198516"/>
           </a:xfrm>
           <a:prstGeom prst="rect">
             <a:avLst/>
@@ -3754,7 +3852,7 @@
           <a:noFill/>
         </p:spPr>
         <p:txBody>
-          <a:bodyPr wrap="square" anchor="t" lIns="45720" rIns="45720" tIns="18288" bIns="18288">
+          <a:bodyPr wrap="square" lIns="45720" tIns="18288" rIns="45720" bIns="18288" anchor="t">
             <a:spAutoFit/>
           </a:bodyPr>
           <a:lstStyle/>
@@ -3769,8 +3867,8 @@
                 <a:solidFill>
                   <a:srgbClr val="008A3E"/>
                 </a:solidFill>
-                <a:latin typeface="Apple SD Gothic Neo"/>
-                <a:ea typeface="Apple SD Gothic Neo"/>
+                <a:latin typeface="NanumSquare Neo Regular" pitchFamily="2" charset="-127"/>
+                <a:ea typeface="NanumSquare Neo Regular" pitchFamily="2" charset="-127"/>
               </a:rPr>
               <a:t>반등기</a:t>
             </a:r>
@@ -3786,7 +3884,7 @@
         <p:spPr>
           <a:xfrm>
             <a:off x="1435608" y="3877056"/>
-            <a:ext cx="2587752" cy="548640"/>
+            <a:ext cx="2587752" cy="351891"/>
           </a:xfrm>
           <a:prstGeom prst="rect">
             <a:avLst/>
@@ -3794,7 +3892,7 @@
           <a:noFill/>
         </p:spPr>
         <p:txBody>
-          <a:bodyPr wrap="square" anchor="t" lIns="45720" rIns="45720" tIns="18288" bIns="18288">
+          <a:bodyPr wrap="square" lIns="45720" tIns="18288" rIns="45720" bIns="18288" anchor="t">
             <a:spAutoFit/>
           </a:bodyPr>
           <a:lstStyle/>
@@ -3809,8 +3907,8 @@
                 <a:solidFill>
                   <a:srgbClr val="6B6B6B"/>
                 </a:solidFill>
-                <a:latin typeface="Apple SD Gothic Neo"/>
-                <a:ea typeface="Apple SD Gothic Neo"/>
+                <a:latin typeface="NanumSquare Neo Regular" pitchFamily="2" charset="-127"/>
+                <a:ea typeface="NanumSquare Neo Regular" pitchFamily="2" charset="-127"/>
               </a:rPr>
               <a:t>직전 분기 역성장 + 심리 저점 통과</a:t>
             </a:r>
@@ -3826,8 +3924,8 @@
                 <a:solidFill>
                   <a:srgbClr val="262626"/>
                 </a:solidFill>
-                <a:latin typeface="Apple SD Gothic Neo"/>
-                <a:ea typeface="Apple SD Gothic Neo"/>
+                <a:latin typeface="NanumSquare Neo Regular" pitchFamily="2" charset="-127"/>
+                <a:ea typeface="NanumSquare Neo Regular" pitchFamily="2" charset="-127"/>
               </a:rPr>
               <a:t>DFM + 딥러닝(TTM)</a:t>
             </a:r>
@@ -3843,7 +3941,7 @@
         <p:spPr>
           <a:xfrm>
             <a:off x="502920" y="4553712"/>
-            <a:ext cx="3520440" cy="1371600"/>
+            <a:ext cx="3520440" cy="1198790"/>
           </a:xfrm>
           <a:prstGeom prst="rect">
             <a:avLst/>
@@ -3851,7 +3949,7 @@
           <a:noFill/>
         </p:spPr>
         <p:txBody>
-          <a:bodyPr wrap="square" anchor="t" lIns="45720" rIns="45720" tIns="18288" bIns="18288">
+          <a:bodyPr wrap="square" lIns="45720" tIns="18288" rIns="45720" bIns="18288" anchor="t">
             <a:spAutoFit/>
           </a:bodyPr>
           <a:lstStyle/>
@@ -3866,8 +3964,8 @@
                 <a:solidFill>
                   <a:srgbClr val="243447"/>
                 </a:solidFill>
-                <a:latin typeface="Apple SD Gothic Neo"/>
-                <a:ea typeface="Apple SD Gothic Neo"/>
+                <a:latin typeface="NanumSquare Neo Regular" pitchFamily="2" charset="-127"/>
+                <a:ea typeface="NanumSquare Neo Regular" pitchFamily="2" charset="-127"/>
               </a:rPr>
               <a:t>반등기가 핵심</a:t>
             </a:r>
@@ -3883,8 +3981,8 @@
                 <a:solidFill>
                   <a:srgbClr val="262626"/>
                 </a:solidFill>
-                <a:latin typeface="Apple SD Gothic Neo"/>
-                <a:ea typeface="Apple SD Gothic Neo"/>
+                <a:latin typeface="NanumSquare Neo Regular" pitchFamily="2" charset="-127"/>
+                <a:ea typeface="NanumSquare Neo Regular" pitchFamily="2" charset="-127"/>
               </a:rPr>
               <a:t>· 역성장 직후 회복 국면은 과거 표본에 드물어 통계·트리</a:t>
             </a:r>
@@ -3900,8 +3998,8 @@
                 <a:solidFill>
                   <a:srgbClr val="262626"/>
                 </a:solidFill>
-                <a:latin typeface="Apple SD Gothic Neo"/>
-                <a:ea typeface="Apple SD Gothic Neo"/>
+                <a:latin typeface="NanumSquare Neo Regular" pitchFamily="2" charset="-127"/>
+                <a:ea typeface="NanumSquare Neo Regular" pitchFamily="2" charset="-127"/>
               </a:rPr>
               <a:t>  모형의 보정이 오히려 오차를 키움 (해당 구간 0.815)</a:t>
             </a:r>
@@ -3917,8 +4015,8 @@
                 <a:solidFill>
                   <a:srgbClr val="262626"/>
                 </a:solidFill>
-                <a:latin typeface="Apple SD Gothic Neo"/>
-                <a:ea typeface="Apple SD Gothic Neo"/>
+                <a:latin typeface="NanumSquare Neo Regular" pitchFamily="2" charset="-127"/>
+                <a:ea typeface="NanumSquare Neo Regular" pitchFamily="2" charset="-127"/>
               </a:rPr>
               <a:t>· 사전학습 딥러닝(TTM)을 결합하면 0.607로 개선 —</a:t>
             </a:r>
@@ -3934,8 +4032,8 @@
                 <a:solidFill>
                   <a:srgbClr val="262626"/>
                 </a:solidFill>
-                <a:latin typeface="Apple SD Gothic Neo"/>
-                <a:ea typeface="Apple SD Gothic Neo"/>
+                <a:latin typeface="NanumSquare Neo Regular" pitchFamily="2" charset="-127"/>
+                <a:ea typeface="NanumSquare Neo Regular" pitchFamily="2" charset="-127"/>
               </a:rPr>
               <a:t>  딥러닝이 정확도에 기여하는 첫 구성</a:t>
             </a:r>
@@ -3951,8 +4049,8 @@
                 <a:solidFill>
                   <a:srgbClr val="262626"/>
                 </a:solidFill>
-                <a:latin typeface="Apple SD Gothic Neo"/>
-                <a:ea typeface="Apple SD Gothic Neo"/>
+                <a:latin typeface="NanumSquare Neo Regular" pitchFamily="2" charset="-127"/>
+                <a:ea typeface="NanumSquare Neo Regular" pitchFamily="2" charset="-127"/>
               </a:rPr>
               <a:t>· 국면 판정을 연속 확신도(soft)로 바꿔도 동일 성능 유지</a:t>
             </a:r>
@@ -3968,8 +4066,8 @@
                 <a:solidFill>
                   <a:srgbClr val="6B6B6B"/>
                 </a:solidFill>
-                <a:latin typeface="Apple SD Gothic Neo"/>
-                <a:ea typeface="Apple SD Gothic Neo"/>
+                <a:latin typeface="NanumSquare Neo Regular" pitchFamily="2" charset="-127"/>
+                <a:ea typeface="NanumSquare Neo Regular" pitchFamily="2" charset="-127"/>
               </a:rPr>
               <a:t>  → 판정 방식에 대한 강건성 확인</a:t>
             </a:r>
@@ -3985,7 +4083,7 @@
         <p:spPr>
           <a:xfrm>
             <a:off x="4315968" y="1417320"/>
-            <a:ext cx="3977639" cy="310896"/>
+            <a:ext cx="3977639" cy="236988"/>
           </a:xfrm>
           <a:prstGeom prst="rect">
             <a:avLst/>
@@ -3993,7 +4091,7 @@
           <a:noFill/>
         </p:spPr>
         <p:txBody>
-          <a:bodyPr wrap="square" anchor="t" lIns="45720" rIns="45720" tIns="18288" bIns="18288">
+          <a:bodyPr wrap="square" lIns="45720" tIns="18288" rIns="45720" bIns="18288" anchor="t">
             <a:spAutoFit/>
           </a:bodyPr>
           <a:lstStyle/>
@@ -4008,8 +4106,8 @@
                 <a:solidFill>
                   <a:srgbClr val="008A3E"/>
                 </a:solidFill>
-                <a:latin typeface="Apple SD Gothic Neo"/>
-                <a:ea typeface="Apple SD Gothic Neo"/>
+                <a:latin typeface="NanumSquare Neo Regular" pitchFamily="2" charset="-127"/>
+                <a:ea typeface="NanumSquare Neo Regular" pitchFamily="2" charset="-127"/>
               </a:rPr>
               <a:t>02  </a:t>
             </a:r>
@@ -4018,8 +4116,8 @@
                 <a:solidFill>
                   <a:srgbClr val="243447"/>
                 </a:solidFill>
-                <a:latin typeface="Apple SD Gothic Neo"/>
-                <a:ea typeface="Apple SD Gothic Neo"/>
+                <a:latin typeface="NanumSquare Neo Regular" pitchFamily="2" charset="-127"/>
+                <a:ea typeface="NanumSquare Neo Regular" pitchFamily="2" charset="-127"/>
               </a:rPr>
               <a:t>종합 성능 — 26개 구성 전수 비교</a:t>
             </a:r>
@@ -4070,7 +4168,7 @@
         <p:spPr>
           <a:xfrm>
             <a:off x="4315968" y="1837944"/>
-            <a:ext cx="3977639" cy="274320"/>
+            <a:ext cx="3977639" cy="175433"/>
           </a:xfrm>
           <a:prstGeom prst="rect">
             <a:avLst/>
@@ -4078,7 +4176,7 @@
           <a:noFill/>
         </p:spPr>
         <p:txBody>
-          <a:bodyPr wrap="square" anchor="t" lIns="45720" rIns="45720" tIns="18288" bIns="18288">
+          <a:bodyPr wrap="square" lIns="45720" tIns="18288" rIns="45720" bIns="18288" anchor="t">
             <a:spAutoFit/>
           </a:bodyPr>
           <a:lstStyle/>
@@ -4093,8 +4191,8 @@
                 <a:solidFill>
                   <a:srgbClr val="6B6B6B"/>
                 </a:solidFill>
-                <a:latin typeface="Apple SD Gothic Neo"/>
-                <a:ea typeface="Apple SD Gothic Neo"/>
+                <a:latin typeface="NanumSquare Neo Regular" pitchFamily="2" charset="-127"/>
+                <a:ea typeface="NanumSquare Neo Regular" pitchFamily="2" charset="-127"/>
               </a:rPr>
               <a:t>속보 GDP 예측오차(RMSE), 2018~2025 32개 분기 실시간 검증</a:t>
             </a:r>
@@ -4107,7 +4205,13 @@
           <p:cNvGraphicFramePr>
             <a:graphicFrameLocks noGrp="1"/>
           </p:cNvGraphicFramePr>
-          <p:nvPr/>
+          <p:nvPr>
+            <p:extLst>
+              <p:ext uri="{D42A27DB-BD31-4B8C-83A1-F6EECF244321}">
+                <p14:modId xmlns:p14="http://schemas.microsoft.com/office/powerpoint/2010/main" val="2100987384"/>
+              </p:ext>
+            </p:extLst>
+          </p:nvPr>
         </p:nvGraphicFramePr>
         <p:xfrm>
           <a:off x="4315968" y="2167128"/>
@@ -4120,9 +4224,27 @@
                 <a:tableStyleId>{5C22544A-7EE6-4342-B048-85BDC9FD1C3A}</a:tableStyleId>
               </a:tblPr>
               <a:tblGrid>
-                <a:gridCol w="457200"/>
-                <a:gridCol w="2743200"/>
-                <a:gridCol w="777240"/>
+                <a:gridCol w="457200">
+                  <a:extLst>
+                    <a:ext uri="{9D8B030D-6E8A-4147-A177-3AD203B41FA5}">
+                      <a16:colId xmlns:a16="http://schemas.microsoft.com/office/drawing/2014/main" val="20000"/>
+                    </a:ext>
+                  </a:extLst>
+                </a:gridCol>
+                <a:gridCol w="2743200">
+                  <a:extLst>
+                    <a:ext uri="{9D8B030D-6E8A-4147-A177-3AD203B41FA5}">
+                      <a16:colId xmlns:a16="http://schemas.microsoft.com/office/drawing/2014/main" val="20001"/>
+                    </a:ext>
+                  </a:extLst>
+                </a:gridCol>
+                <a:gridCol w="777240">
+                  <a:extLst>
+                    <a:ext uri="{9D8B030D-6E8A-4147-A177-3AD203B41FA5}">
+                      <a16:colId xmlns:a16="http://schemas.microsoft.com/office/drawing/2014/main" val="20002"/>
+                    </a:ext>
+                  </a:extLst>
+                </a:gridCol>
               </a:tblGrid>
               <a:tr h="292608">
                 <a:tc>
@@ -4132,18 +4254,25 @@
                     <a:p>
                       <a:pPr algn="ctr"/>
                       <a:r>
-                        <a:rPr sz="880" b="1">
+                        <a:rPr sz="880" b="1" dirty="0" err="1">
                           <a:solidFill>
                             <a:srgbClr val="FFFFFF"/>
                           </a:solidFill>
-                          <a:latin typeface="Apple SD Gothic Neo"/>
-                          <a:ea typeface="Apple SD Gothic Neo"/>
+                          <a:latin typeface="NanumSquare Neo Regular" pitchFamily="2" charset="-127"/>
+                          <a:ea typeface="NanumSquare Neo Regular" pitchFamily="2" charset="-127"/>
                         </a:rPr>
                         <a:t>순위</a:t>
                       </a:r>
+                      <a:endParaRPr sz="880" b="1" dirty="0">
+                        <a:solidFill>
+                          <a:srgbClr val="FFFFFF"/>
+                        </a:solidFill>
+                        <a:latin typeface="NanumSquare Neo Regular" pitchFamily="2" charset="-127"/>
+                        <a:ea typeface="NanumSquare Neo Regular" pitchFamily="2" charset="-127"/>
+                      </a:endParaRPr>
                     </a:p>
                   </a:txBody>
-                  <a:tcPr marL="36576" marR="27432" marT="10972" marB="10972">
+                  <a:tcPr marL="36576" marR="27432" marT="10972" marB="10972" anchor="ctr">
                     <a:solidFill>
                       <a:srgbClr val="243447"/>
                     </a:solidFill>
@@ -4156,18 +4285,25 @@
                     <a:p>
                       <a:pPr algn="l"/>
                       <a:r>
-                        <a:rPr sz="880" b="1">
+                        <a:rPr sz="880" b="1" dirty="0" err="1">
                           <a:solidFill>
                             <a:srgbClr val="FFFFFF"/>
                           </a:solidFill>
-                          <a:latin typeface="Apple SD Gothic Neo"/>
-                          <a:ea typeface="Apple SD Gothic Neo"/>
+                          <a:latin typeface="NanumSquare Neo Regular" pitchFamily="2" charset="-127"/>
+                          <a:ea typeface="NanumSquare Neo Regular" pitchFamily="2" charset="-127"/>
                         </a:rPr>
                         <a:t>구성</a:t>
                       </a:r>
+                      <a:endParaRPr sz="880" b="1" dirty="0">
+                        <a:solidFill>
+                          <a:srgbClr val="FFFFFF"/>
+                        </a:solidFill>
+                        <a:latin typeface="NanumSquare Neo Regular" pitchFamily="2" charset="-127"/>
+                        <a:ea typeface="NanumSquare Neo Regular" pitchFamily="2" charset="-127"/>
+                      </a:endParaRPr>
                     </a:p>
                   </a:txBody>
-                  <a:tcPr marL="36576" marR="27432" marT="10972" marB="10972">
+                  <a:tcPr marL="36576" marR="27432" marT="10972" marB="10972" anchor="ctr">
                     <a:solidFill>
                       <a:srgbClr val="243447"/>
                     </a:solidFill>
@@ -4184,19 +4320,24 @@
                           <a:solidFill>
                             <a:srgbClr val="FFFFFF"/>
                           </a:solidFill>
-                          <a:latin typeface="Apple SD Gothic Neo"/>
-                          <a:ea typeface="Apple SD Gothic Neo"/>
+                          <a:latin typeface="NanumSquare Neo Regular" pitchFamily="2" charset="-127"/>
+                          <a:ea typeface="NanumSquare Neo Regular" pitchFamily="2" charset="-127"/>
                         </a:rPr>
                         <a:t>RMSE</a:t>
                       </a:r>
                     </a:p>
                   </a:txBody>
-                  <a:tcPr marL="36576" marR="27432" marT="10972" marB="10972">
+                  <a:tcPr marL="36576" marR="27432" marT="10972" marB="10972" anchor="ctr">
                     <a:solidFill>
                       <a:srgbClr val="243447"/>
                     </a:solidFill>
                   </a:tcPr>
                 </a:tc>
+                <a:extLst>
+                  <a:ext uri="{0D108BD9-81ED-4DB2-BD59-A6C34878D82A}">
+                    <a16:rowId xmlns:a16="http://schemas.microsoft.com/office/drawing/2014/main" val="10000"/>
+                  </a:ext>
+                </a:extLst>
               </a:tr>
               <a:tr h="292608">
                 <a:tc>
@@ -4210,14 +4351,14 @@
                           <a:solidFill>
                             <a:srgbClr val="262626"/>
                           </a:solidFill>
-                          <a:latin typeface="Apple SD Gothic Neo"/>
-                          <a:ea typeface="Apple SD Gothic Neo"/>
+                          <a:latin typeface="NanumSquare Neo Regular" pitchFamily="2" charset="-127"/>
+                          <a:ea typeface="NanumSquare Neo Regular" pitchFamily="2" charset="-127"/>
                         </a:rPr>
                         <a:t>1</a:t>
                       </a:r>
                     </a:p>
                   </a:txBody>
-                  <a:tcPr marL="36576" marR="27432" marT="10972" marB="10972">
+                  <a:tcPr marL="36576" marR="27432" marT="10972" marB="10972" anchor="ctr">
                     <a:solidFill>
                       <a:srgbClr val="E8F3EC"/>
                     </a:solidFill>
@@ -4230,18 +4371,108 @@
                     <a:p>
                       <a:pPr algn="l"/>
                       <a:r>
-                        <a:rPr sz="880" b="1">
+                        <a:rPr sz="880" b="1" dirty="0" err="1">
                           <a:solidFill>
                             <a:srgbClr val="262626"/>
                           </a:solidFill>
-                          <a:latin typeface="Apple SD Gothic Neo"/>
-                          <a:ea typeface="Apple SD Gothic Neo"/>
-                        </a:rPr>
-                        <a:t>제안: 게이트 v3 (반등기 딥러닝 결합)</a:t>
+                          <a:latin typeface="NanumSquare Neo Regular" pitchFamily="2" charset="-127"/>
+                          <a:ea typeface="NanumSquare Neo Regular" pitchFamily="2" charset="-127"/>
+                        </a:rPr>
+                        <a:t>제안</a:t>
+                      </a:r>
+                      <a:r>
+                        <a:rPr sz="880" b="1" dirty="0">
+                          <a:solidFill>
+                            <a:srgbClr val="262626"/>
+                          </a:solidFill>
+                          <a:latin typeface="NanumSquare Neo Regular" pitchFamily="2" charset="-127"/>
+                          <a:ea typeface="NanumSquare Neo Regular" pitchFamily="2" charset="-127"/>
+                        </a:rPr>
+                        <a:t>: </a:t>
+                      </a:r>
+                      <a:r>
+                        <a:rPr sz="880" b="1" dirty="0" err="1">
+                          <a:solidFill>
+                            <a:srgbClr val="262626"/>
+                          </a:solidFill>
+                          <a:latin typeface="NanumSquare Neo Regular" pitchFamily="2" charset="-127"/>
+                          <a:ea typeface="NanumSquare Neo Regular" pitchFamily="2" charset="-127"/>
+                        </a:rPr>
+                        <a:t>게이트</a:t>
+                      </a:r>
+                      <a:r>
+                        <a:rPr sz="880" b="1" dirty="0">
+                          <a:solidFill>
+                            <a:srgbClr val="262626"/>
+                          </a:solidFill>
+                          <a:latin typeface="NanumSquare Neo Regular" pitchFamily="2" charset="-127"/>
+                          <a:ea typeface="NanumSquare Neo Regular" pitchFamily="2" charset="-127"/>
+                        </a:rPr>
+                        <a:t> v3 (</a:t>
+                      </a:r>
+                      <a:r>
+                        <a:rPr sz="880" b="1" dirty="0" err="1">
+                          <a:solidFill>
+                            <a:srgbClr val="262626"/>
+                          </a:solidFill>
+                          <a:latin typeface="NanumSquare Neo Regular" pitchFamily="2" charset="-127"/>
+                          <a:ea typeface="NanumSquare Neo Regular" pitchFamily="2" charset="-127"/>
+                        </a:rPr>
+                        <a:t>반등기</a:t>
+                      </a:r>
+                      <a:r>
+                        <a:rPr sz="880" b="1" dirty="0">
+                          <a:solidFill>
+                            <a:srgbClr val="262626"/>
+                          </a:solidFill>
+                          <a:latin typeface="NanumSquare Neo Regular" pitchFamily="2" charset="-127"/>
+                          <a:ea typeface="NanumSquare Neo Regular" pitchFamily="2" charset="-127"/>
+                        </a:rPr>
+                        <a:t> </a:t>
+                      </a:r>
+                      <a:r>
+                        <a:rPr sz="880" b="1" dirty="0" err="1">
+                          <a:solidFill>
+                            <a:srgbClr val="262626"/>
+                          </a:solidFill>
+                          <a:latin typeface="NanumSquare Neo Regular" pitchFamily="2" charset="-127"/>
+                          <a:ea typeface="NanumSquare Neo Regular" pitchFamily="2" charset="-127"/>
+                        </a:rPr>
+                        <a:t>딥러닝</a:t>
+                      </a:r>
+                      <a:r>
+                        <a:rPr sz="880" b="1" dirty="0">
+                          <a:solidFill>
+                            <a:srgbClr val="262626"/>
+                          </a:solidFill>
+                          <a:latin typeface="NanumSquare Neo Regular" pitchFamily="2" charset="-127"/>
+                          <a:ea typeface="NanumSquare Neo Regular" pitchFamily="2" charset="-127"/>
+                        </a:rPr>
+                        <a:t> </a:t>
+                      </a:r>
+                      <a:r>
+                        <a:rPr sz="880" b="1" dirty="0" err="1">
+                          <a:solidFill>
+                            <a:srgbClr val="262626"/>
+                          </a:solidFill>
+                          <a:latin typeface="NanumSquare Neo Regular" pitchFamily="2" charset="-127"/>
+                          <a:ea typeface="NanumSquare Neo Regular" pitchFamily="2" charset="-127"/>
+                        </a:rPr>
+                        <a:t>결합</a:t>
+                      </a:r>
+                      <a:r>
+                        <a:rPr sz="880" b="1" dirty="0">
+                          <a:solidFill>
+                            <a:srgbClr val="262626"/>
+                          </a:solidFill>
+                          <a:latin typeface="NanumSquare Neo Regular" pitchFamily="2" charset="-127"/>
+                          <a:ea typeface="NanumSquare Neo Regular" pitchFamily="2" charset="-127"/>
+                        </a:rPr>
+                        <a:t>)</a:t>
                       </a:r>
                     </a:p>
                   </a:txBody>
-                  <a:tcPr marL="36576" marR="27432" marT="10972" marB="10972">
+                  <a:tcPr marL="36576" marR="27432" marT="10972" marB="10972" anchor="ctr">
                     <a:solidFill>
                       <a:srgbClr val="E8F3EC"/>
                     </a:solidFill>
@@ -4254,23 +4485,28 @@
                     <a:p>
                       <a:pPr algn="ctr"/>
                       <a:r>
-                        <a:rPr sz="880" b="1">
+                        <a:rPr sz="880" b="1" dirty="0">
                           <a:solidFill>
                             <a:srgbClr val="262626"/>
                           </a:solidFill>
-                          <a:latin typeface="Apple SD Gothic Neo"/>
-                          <a:ea typeface="Apple SD Gothic Neo"/>
+                          <a:latin typeface="NanumSquare Neo Regular" pitchFamily="2" charset="-127"/>
+                          <a:ea typeface="NanumSquare Neo Regular" pitchFamily="2" charset="-127"/>
                         </a:rPr>
                         <a:t>0.718</a:t>
                       </a:r>
                     </a:p>
                   </a:txBody>
-                  <a:tcPr marL="36576" marR="27432" marT="10972" marB="10972">
+                  <a:tcPr marL="36576" marR="27432" marT="10972" marB="10972" anchor="ctr">
                     <a:solidFill>
                       <a:srgbClr val="E8F3EC"/>
                     </a:solidFill>
                   </a:tcPr>
                 </a:tc>
+                <a:extLst>
+                  <a:ext uri="{0D108BD9-81ED-4DB2-BD59-A6C34878D82A}">
+                    <a16:rowId xmlns:a16="http://schemas.microsoft.com/office/drawing/2014/main" val="10001"/>
+                  </a:ext>
+                </a:extLst>
               </a:tr>
               <a:tr h="292608">
                 <a:tc>
@@ -4284,14 +4520,14 @@
                           <a:solidFill>
                             <a:srgbClr val="262626"/>
                           </a:solidFill>
-                          <a:latin typeface="Apple SD Gothic Neo"/>
-                          <a:ea typeface="Apple SD Gothic Neo"/>
+                          <a:latin typeface="NanumSquare Neo Regular" pitchFamily="2" charset="-127"/>
+                          <a:ea typeface="NanumSquare Neo Regular" pitchFamily="2" charset="-127"/>
                         </a:rPr>
                         <a:t>2</a:t>
                       </a:r>
                     </a:p>
                   </a:txBody>
-                  <a:tcPr marL="36576" marR="27432" marT="10972" marB="10972">
+                  <a:tcPr marL="36576" marR="27432" marT="10972" marB="10972" anchor="ctr">
                     <a:solidFill>
                       <a:srgbClr val="FFFFFF"/>
                     </a:solidFill>
@@ -4304,18 +4540,65 @@
                     <a:p>
                       <a:pPr algn="l"/>
                       <a:r>
-                        <a:rPr sz="880" b="0">
+                        <a:rPr sz="880" b="0" dirty="0" err="1">
                           <a:solidFill>
                             <a:srgbClr val="262626"/>
                           </a:solidFill>
-                          <a:latin typeface="Apple SD Gothic Neo"/>
-                          <a:ea typeface="Apple SD Gothic Neo"/>
-                        </a:rPr>
-                        <a:t>DFM+XGBoost  — 기존 최고</a:t>
-                      </a:r>
+                          <a:latin typeface="NanumSquare Neo Regular" pitchFamily="2" charset="-127"/>
+                          <a:ea typeface="NanumSquare Neo Regular" pitchFamily="2" charset="-127"/>
+                        </a:rPr>
+                        <a:t>DFM+XGBoost</a:t>
+                      </a:r>
+                      <a:r>
+                        <a:rPr sz="880" b="0" dirty="0">
+                          <a:solidFill>
+                            <a:srgbClr val="262626"/>
+                          </a:solidFill>
+                          <a:latin typeface="NanumSquare Neo Regular" pitchFamily="2" charset="-127"/>
+                          <a:ea typeface="NanumSquare Neo Regular" pitchFamily="2" charset="-127"/>
+                        </a:rPr>
+                        <a:t>  — </a:t>
+                      </a:r>
+                      <a:r>
+                        <a:rPr sz="880" b="0" dirty="0" err="1">
+                          <a:solidFill>
+                            <a:srgbClr val="262626"/>
+                          </a:solidFill>
+                          <a:latin typeface="NanumSquare Neo Regular" pitchFamily="2" charset="-127"/>
+                          <a:ea typeface="NanumSquare Neo Regular" pitchFamily="2" charset="-127"/>
+                        </a:rPr>
+                        <a:t>기존</a:t>
+                      </a:r>
+                      <a:r>
+                        <a:rPr sz="880" b="0" dirty="0">
+                          <a:solidFill>
+                            <a:srgbClr val="262626"/>
+                          </a:solidFill>
+                          <a:latin typeface="NanumSquare Neo Regular" pitchFamily="2" charset="-127"/>
+                          <a:ea typeface="NanumSquare Neo Regular" pitchFamily="2" charset="-127"/>
+                        </a:rPr>
+                        <a:t> </a:t>
+                      </a:r>
+                      <a:r>
+                        <a:rPr sz="880" b="0" dirty="0" err="1">
+                          <a:solidFill>
+                            <a:srgbClr val="262626"/>
+                          </a:solidFill>
+                          <a:latin typeface="NanumSquare Neo Regular" pitchFamily="2" charset="-127"/>
+                          <a:ea typeface="NanumSquare Neo Regular" pitchFamily="2" charset="-127"/>
+                        </a:rPr>
+                        <a:t>최고</a:t>
+                      </a:r>
+                      <a:endParaRPr sz="880" b="0" dirty="0">
+                        <a:solidFill>
+                          <a:srgbClr val="262626"/>
+                        </a:solidFill>
+                        <a:latin typeface="NanumSquare Neo Regular" pitchFamily="2" charset="-127"/>
+                        <a:ea typeface="NanumSquare Neo Regular" pitchFamily="2" charset="-127"/>
+                      </a:endParaRPr>
                     </a:p>
                   </a:txBody>
-                  <a:tcPr marL="36576" marR="27432" marT="10972" marB="10972">
+                  <a:tcPr marL="36576" marR="27432" marT="10972" marB="10972" anchor="ctr">
                     <a:solidFill>
                       <a:srgbClr val="FFFFFF"/>
                     </a:solidFill>
@@ -4332,19 +4615,24 @@
                           <a:solidFill>
                             <a:srgbClr val="262626"/>
                           </a:solidFill>
-                          <a:latin typeface="Apple SD Gothic Neo"/>
-                          <a:ea typeface="Apple SD Gothic Neo"/>
+                          <a:latin typeface="NanumSquare Neo Regular" pitchFamily="2" charset="-127"/>
+                          <a:ea typeface="NanumSquare Neo Regular" pitchFamily="2" charset="-127"/>
                         </a:rPr>
                         <a:t>0.765</a:t>
                       </a:r>
                     </a:p>
                   </a:txBody>
-                  <a:tcPr marL="36576" marR="27432" marT="10972" marB="10972">
+                  <a:tcPr marL="36576" marR="27432" marT="10972" marB="10972" anchor="ctr">
                     <a:solidFill>
                       <a:srgbClr val="FFFFFF"/>
                     </a:solidFill>
                   </a:tcPr>
                 </a:tc>
+                <a:extLst>
+                  <a:ext uri="{0D108BD9-81ED-4DB2-BD59-A6C34878D82A}">
+                    <a16:rowId xmlns:a16="http://schemas.microsoft.com/office/drawing/2014/main" val="10002"/>
+                  </a:ext>
+                </a:extLst>
               </a:tr>
               <a:tr h="292608">
                 <a:tc>
@@ -4358,14 +4646,14 @@
                           <a:solidFill>
                             <a:srgbClr val="262626"/>
                           </a:solidFill>
-                          <a:latin typeface="Apple SD Gothic Neo"/>
-                          <a:ea typeface="Apple SD Gothic Neo"/>
+                          <a:latin typeface="NanumSquare Neo Regular" pitchFamily="2" charset="-127"/>
+                          <a:ea typeface="NanumSquare Neo Regular" pitchFamily="2" charset="-127"/>
                         </a:rPr>
                         <a:t>3</a:t>
                       </a:r>
                     </a:p>
                   </a:txBody>
-                  <a:tcPr marL="36576" marR="27432" marT="10972" marB="10972">
+                  <a:tcPr marL="36576" marR="27432" marT="10972" marB="10972" anchor="ctr">
                     <a:solidFill>
                       <a:srgbClr val="FFFFFF"/>
                     </a:solidFill>
@@ -4378,18 +4666,48 @@
                     <a:p>
                       <a:pPr algn="l"/>
                       <a:r>
-                        <a:rPr sz="880" b="0">
+                        <a:rPr sz="880" b="0" dirty="0" err="1">
                           <a:solidFill>
                             <a:srgbClr val="262626"/>
                           </a:solidFill>
-                          <a:latin typeface="Apple SD Gothic Neo"/>
-                          <a:ea typeface="Apple SD Gothic Neo"/>
-                        </a:rPr>
-                        <a:t>DFM+TabPFN (사전학습 DL)</a:t>
+                          <a:latin typeface="NanumSquare Neo Regular" pitchFamily="2" charset="-127"/>
+                          <a:ea typeface="NanumSquare Neo Regular" pitchFamily="2" charset="-127"/>
+                        </a:rPr>
+                        <a:t>DFM+TabPFN</a:t>
+                      </a:r>
+                      <a:r>
+                        <a:rPr sz="880" b="0" dirty="0">
+                          <a:solidFill>
+                            <a:srgbClr val="262626"/>
+                          </a:solidFill>
+                          <a:latin typeface="NanumSquare Neo Regular" pitchFamily="2" charset="-127"/>
+                          <a:ea typeface="NanumSquare Neo Regular" pitchFamily="2" charset="-127"/>
+                        </a:rPr>
+                        <a:t> (</a:t>
+                      </a:r>
+                      <a:r>
+                        <a:rPr sz="880" b="0" dirty="0" err="1">
+                          <a:solidFill>
+                            <a:srgbClr val="262626"/>
+                          </a:solidFill>
+                          <a:latin typeface="NanumSquare Neo Regular" pitchFamily="2" charset="-127"/>
+                          <a:ea typeface="NanumSquare Neo Regular" pitchFamily="2" charset="-127"/>
+                        </a:rPr>
+                        <a:t>사전학습</a:t>
+                      </a:r>
+                      <a:r>
+                        <a:rPr sz="880" b="0" dirty="0">
+                          <a:solidFill>
+                            <a:srgbClr val="262626"/>
+                          </a:solidFill>
+                          <a:latin typeface="NanumSquare Neo Regular" pitchFamily="2" charset="-127"/>
+                          <a:ea typeface="NanumSquare Neo Regular" pitchFamily="2" charset="-127"/>
+                        </a:rPr>
+                        <a:t> DL)</a:t>
                       </a:r>
                     </a:p>
                   </a:txBody>
-                  <a:tcPr marL="36576" marR="27432" marT="10972" marB="10972">
+                  <a:tcPr marL="36576" marR="27432" marT="10972" marB="10972" anchor="ctr">
                     <a:solidFill>
                       <a:srgbClr val="FFFFFF"/>
                     </a:solidFill>
@@ -4406,19 +4724,24 @@
                           <a:solidFill>
                             <a:srgbClr val="262626"/>
                           </a:solidFill>
-                          <a:latin typeface="Apple SD Gothic Neo"/>
-                          <a:ea typeface="Apple SD Gothic Neo"/>
+                          <a:latin typeface="NanumSquare Neo Regular" pitchFamily="2" charset="-127"/>
+                          <a:ea typeface="NanumSquare Neo Regular" pitchFamily="2" charset="-127"/>
                         </a:rPr>
                         <a:t>0.815</a:t>
                       </a:r>
                     </a:p>
                   </a:txBody>
-                  <a:tcPr marL="36576" marR="27432" marT="10972" marB="10972">
+                  <a:tcPr marL="36576" marR="27432" marT="10972" marB="10972" anchor="ctr">
                     <a:solidFill>
                       <a:srgbClr val="FFFFFF"/>
                     </a:solidFill>
                   </a:tcPr>
                 </a:tc>
+                <a:extLst>
+                  <a:ext uri="{0D108BD9-81ED-4DB2-BD59-A6C34878D82A}">
+                    <a16:rowId xmlns:a16="http://schemas.microsoft.com/office/drawing/2014/main" val="10003"/>
+                  </a:ext>
+                </a:extLst>
               </a:tr>
               <a:tr h="292608">
                 <a:tc>
@@ -4428,18 +4751,18 @@
                     <a:p>
                       <a:pPr algn="ctr"/>
                       <a:r>
-                        <a:rPr sz="880" b="0">
+                        <a:rPr sz="880" b="0" dirty="0">
                           <a:solidFill>
                             <a:srgbClr val="262626"/>
                           </a:solidFill>
-                          <a:latin typeface="Apple SD Gothic Neo"/>
-                          <a:ea typeface="Apple SD Gothic Neo"/>
+                          <a:latin typeface="NanumSquare Neo Regular" pitchFamily="2" charset="-127"/>
+                          <a:ea typeface="NanumSquare Neo Regular" pitchFamily="2" charset="-127"/>
                         </a:rPr>
                         <a:t>4</a:t>
                       </a:r>
                     </a:p>
                   </a:txBody>
-                  <a:tcPr marL="36576" marR="27432" marT="10972" marB="10972">
+                  <a:tcPr marL="36576" marR="27432" marT="10972" marB="10972" anchor="ctr">
                     <a:solidFill>
                       <a:srgbClr val="FFFFFF"/>
                     </a:solidFill>
@@ -4452,18 +4775,28 @@
                     <a:p>
                       <a:pPr algn="l"/>
                       <a:r>
-                        <a:rPr sz="880" b="0">
+                        <a:rPr sz="880" b="0" dirty="0" err="1">
                           <a:solidFill>
                             <a:srgbClr val="262626"/>
                           </a:solidFill>
-                          <a:latin typeface="Apple SD Gothic Neo"/>
-                          <a:ea typeface="Apple SD Gothic Neo"/>
-                        </a:rPr>
-                        <a:t>DFM+신경망(MLP)</a:t>
+                          <a:latin typeface="NanumSquare Neo Regular" pitchFamily="2" charset="-127"/>
+                          <a:ea typeface="NanumSquare Neo Regular" pitchFamily="2" charset="-127"/>
+                        </a:rPr>
+                        <a:t>DFM+신경망</a:t>
+                      </a:r>
+                      <a:r>
+                        <a:rPr sz="880" b="0" dirty="0">
+                          <a:solidFill>
+                            <a:srgbClr val="262626"/>
+                          </a:solidFill>
+                          <a:latin typeface="NanumSquare Neo Regular" pitchFamily="2" charset="-127"/>
+                          <a:ea typeface="NanumSquare Neo Regular" pitchFamily="2" charset="-127"/>
+                        </a:rPr>
+                        <a:t>(MLP)</a:t>
                       </a:r>
                     </a:p>
                   </a:txBody>
-                  <a:tcPr marL="36576" marR="27432" marT="10972" marB="10972">
+                  <a:tcPr marL="36576" marR="27432" marT="10972" marB="10972" anchor="ctr">
                     <a:solidFill>
                       <a:srgbClr val="FFFFFF"/>
                     </a:solidFill>
@@ -4476,23 +4809,28 @@
                     <a:p>
                       <a:pPr algn="ctr"/>
                       <a:r>
-                        <a:rPr sz="880" b="0">
+                        <a:rPr sz="880" b="0" dirty="0">
                           <a:solidFill>
                             <a:srgbClr val="262626"/>
                           </a:solidFill>
-                          <a:latin typeface="Apple SD Gothic Neo"/>
-                          <a:ea typeface="Apple SD Gothic Neo"/>
+                          <a:latin typeface="NanumSquare Neo Regular" pitchFamily="2" charset="-127"/>
+                          <a:ea typeface="NanumSquare Neo Regular" pitchFamily="2" charset="-127"/>
                         </a:rPr>
                         <a:t>0.820</a:t>
                       </a:r>
                     </a:p>
                   </a:txBody>
-                  <a:tcPr marL="36576" marR="27432" marT="10972" marB="10972">
+                  <a:tcPr marL="36576" marR="27432" marT="10972" marB="10972" anchor="ctr">
                     <a:solidFill>
                       <a:srgbClr val="FFFFFF"/>
                     </a:solidFill>
                   </a:tcPr>
                 </a:tc>
+                <a:extLst>
+                  <a:ext uri="{0D108BD9-81ED-4DB2-BD59-A6C34878D82A}">
+                    <a16:rowId xmlns:a16="http://schemas.microsoft.com/office/drawing/2014/main" val="10004"/>
+                  </a:ext>
+                </a:extLst>
               </a:tr>
               <a:tr h="292608">
                 <a:tc>
@@ -4506,14 +4844,14 @@
                           <a:solidFill>
                             <a:srgbClr val="262626"/>
                           </a:solidFill>
-                          <a:latin typeface="Apple SD Gothic Neo"/>
-                          <a:ea typeface="Apple SD Gothic Neo"/>
+                          <a:latin typeface="NanumSquare Neo Regular" pitchFamily="2" charset="-127"/>
+                          <a:ea typeface="NanumSquare Neo Regular" pitchFamily="2" charset="-127"/>
                         </a:rPr>
                         <a:t>5</a:t>
                       </a:r>
                     </a:p>
                   </a:txBody>
-                  <a:tcPr marL="36576" marR="27432" marT="10972" marB="10972">
+                  <a:tcPr marL="36576" marR="27432" marT="10972" marB="10972" anchor="ctr">
                     <a:solidFill>
                       <a:srgbClr val="FFFFFF"/>
                     </a:solidFill>
@@ -4526,18 +4864,38 @@
                     <a:p>
                       <a:pPr algn="l"/>
                       <a:r>
-                        <a:rPr sz="880" b="0">
+                        <a:rPr sz="880" b="0" dirty="0">
                           <a:solidFill>
                             <a:srgbClr val="262626"/>
                           </a:solidFill>
-                          <a:latin typeface="Apple SD Gothic Neo"/>
-                          <a:ea typeface="Apple SD Gothic Neo"/>
-                        </a:rPr>
-                        <a:t>DFM+TTM (사전학습 DL)</a:t>
+                          <a:latin typeface="NanumSquare Neo Regular" pitchFamily="2" charset="-127"/>
+                          <a:ea typeface="NanumSquare Neo Regular" pitchFamily="2" charset="-127"/>
+                        </a:rPr>
+                        <a:t>DFM+TTM (</a:t>
+                      </a:r>
+                      <a:r>
+                        <a:rPr sz="880" b="0" dirty="0" err="1">
+                          <a:solidFill>
+                            <a:srgbClr val="262626"/>
+                          </a:solidFill>
+                          <a:latin typeface="NanumSquare Neo Regular" pitchFamily="2" charset="-127"/>
+                          <a:ea typeface="NanumSquare Neo Regular" pitchFamily="2" charset="-127"/>
+                        </a:rPr>
+                        <a:t>사전학습</a:t>
+                      </a:r>
+                      <a:r>
+                        <a:rPr sz="880" b="0" dirty="0">
+                          <a:solidFill>
+                            <a:srgbClr val="262626"/>
+                          </a:solidFill>
+                          <a:latin typeface="NanumSquare Neo Regular" pitchFamily="2" charset="-127"/>
+                          <a:ea typeface="NanumSquare Neo Regular" pitchFamily="2" charset="-127"/>
+                        </a:rPr>
+                        <a:t> DL)</a:t>
                       </a:r>
                     </a:p>
                   </a:txBody>
-                  <a:tcPr marL="36576" marR="27432" marT="10972" marB="10972">
+                  <a:tcPr marL="36576" marR="27432" marT="10972" marB="10972" anchor="ctr">
                     <a:solidFill>
                       <a:srgbClr val="FFFFFF"/>
                     </a:solidFill>
@@ -4554,19 +4912,24 @@
                           <a:solidFill>
                             <a:srgbClr val="262626"/>
                           </a:solidFill>
-                          <a:latin typeface="Apple SD Gothic Neo"/>
-                          <a:ea typeface="Apple SD Gothic Neo"/>
+                          <a:latin typeface="NanumSquare Neo Regular" pitchFamily="2" charset="-127"/>
+                          <a:ea typeface="NanumSquare Neo Regular" pitchFamily="2" charset="-127"/>
                         </a:rPr>
                         <a:t>0.846</a:t>
                       </a:r>
                     </a:p>
                   </a:txBody>
-                  <a:tcPr marL="36576" marR="27432" marT="10972" marB="10972">
+                  <a:tcPr marL="36576" marR="27432" marT="10972" marB="10972" anchor="ctr">
                     <a:solidFill>
                       <a:srgbClr val="FFFFFF"/>
                     </a:solidFill>
                   </a:tcPr>
                 </a:tc>
+                <a:extLst>
+                  <a:ext uri="{0D108BD9-81ED-4DB2-BD59-A6C34878D82A}">
+                    <a16:rowId xmlns:a16="http://schemas.microsoft.com/office/drawing/2014/main" val="10005"/>
+                  </a:ext>
+                </a:extLst>
               </a:tr>
               <a:tr h="292608">
                 <a:tc>
@@ -4580,14 +4943,14 @@
                           <a:solidFill>
                             <a:srgbClr val="262626"/>
                           </a:solidFill>
-                          <a:latin typeface="Apple SD Gothic Neo"/>
-                          <a:ea typeface="Apple SD Gothic Neo"/>
+                          <a:latin typeface="NanumSquare Neo Regular" pitchFamily="2" charset="-127"/>
+                          <a:ea typeface="NanumSquare Neo Regular" pitchFamily="2" charset="-127"/>
                         </a:rPr>
                         <a:t>6</a:t>
                       </a:r>
                     </a:p>
                   </a:txBody>
-                  <a:tcPr marL="36576" marR="27432" marT="10972" marB="10972">
+                  <a:tcPr marL="36576" marR="27432" marT="10972" marB="10972" anchor="ctr">
                     <a:solidFill>
                       <a:srgbClr val="FFFFFF"/>
                     </a:solidFill>
@@ -4600,18 +4963,115 @@
                     <a:p>
                       <a:pPr algn="l"/>
                       <a:r>
-                        <a:rPr sz="880" b="0">
+                        <a:rPr sz="880" b="0" dirty="0">
                           <a:solidFill>
                             <a:srgbClr val="262626"/>
                           </a:solidFill>
-                          <a:latin typeface="Apple SD Gothic Neo"/>
-                          <a:ea typeface="Apple SD Gothic Neo"/>
-                        </a:rPr>
-                        <a:t>TTM 단독 — DL 단독 최초 기준선 상회</a:t>
-                      </a:r>
+                          <a:latin typeface="NanumSquare Neo Regular" pitchFamily="2" charset="-127"/>
+                          <a:ea typeface="NanumSquare Neo Regular" pitchFamily="2" charset="-127"/>
+                        </a:rPr>
+                        <a:t>TTM </a:t>
+                      </a:r>
+                      <a:r>
+                        <a:rPr sz="880" b="0" dirty="0" err="1">
+                          <a:solidFill>
+                            <a:srgbClr val="262626"/>
+                          </a:solidFill>
+                          <a:latin typeface="NanumSquare Neo Regular" pitchFamily="2" charset="-127"/>
+                          <a:ea typeface="NanumSquare Neo Regular" pitchFamily="2" charset="-127"/>
+                        </a:rPr>
+                        <a:t>단독</a:t>
+                      </a:r>
+                      <a:r>
+                        <a:rPr sz="880" b="0" dirty="0">
+                          <a:solidFill>
+                            <a:srgbClr val="262626"/>
+                          </a:solidFill>
+                          <a:latin typeface="NanumSquare Neo Regular" pitchFamily="2" charset="-127"/>
+                          <a:ea typeface="NanumSquare Neo Regular" pitchFamily="2" charset="-127"/>
+                        </a:rPr>
+                        <a:t> — DL </a:t>
+                      </a:r>
+                      <a:r>
+                        <a:rPr sz="880" b="0" dirty="0" err="1">
+                          <a:solidFill>
+                            <a:srgbClr val="262626"/>
+                          </a:solidFill>
+                          <a:latin typeface="NanumSquare Neo Regular" pitchFamily="2" charset="-127"/>
+                          <a:ea typeface="NanumSquare Neo Regular" pitchFamily="2" charset="-127"/>
+                        </a:rPr>
+                        <a:t>단독</a:t>
+                      </a:r>
+                      <a:r>
+                        <a:rPr sz="880" b="0" dirty="0">
+                          <a:solidFill>
+                            <a:srgbClr val="262626"/>
+                          </a:solidFill>
+                          <a:latin typeface="NanumSquare Neo Regular" pitchFamily="2" charset="-127"/>
+                          <a:ea typeface="NanumSquare Neo Regular" pitchFamily="2" charset="-127"/>
+                        </a:rPr>
+                        <a:t> </a:t>
+                      </a:r>
+                      <a:r>
+                        <a:rPr sz="880" b="0" dirty="0" err="1">
+                          <a:solidFill>
+                            <a:srgbClr val="262626"/>
+                          </a:solidFill>
+                          <a:latin typeface="NanumSquare Neo Regular" pitchFamily="2" charset="-127"/>
+                          <a:ea typeface="NanumSquare Neo Regular" pitchFamily="2" charset="-127"/>
+                        </a:rPr>
+                        <a:t>최초</a:t>
+                      </a:r>
+                      <a:r>
+                        <a:rPr sz="880" b="0" dirty="0">
+                          <a:solidFill>
+                            <a:srgbClr val="262626"/>
+                          </a:solidFill>
+                          <a:latin typeface="NanumSquare Neo Regular" pitchFamily="2" charset="-127"/>
+                          <a:ea typeface="NanumSquare Neo Regular" pitchFamily="2" charset="-127"/>
+                        </a:rPr>
+                        <a:t> </a:t>
+                      </a:r>
+                      <a:r>
+                        <a:rPr sz="880" b="0" dirty="0" err="1">
+                          <a:solidFill>
+                            <a:srgbClr val="262626"/>
+                          </a:solidFill>
+                          <a:latin typeface="NanumSquare Neo Regular" pitchFamily="2" charset="-127"/>
+                          <a:ea typeface="NanumSquare Neo Regular" pitchFamily="2" charset="-127"/>
+                        </a:rPr>
+                        <a:t>기준선</a:t>
+                      </a:r>
+                      <a:r>
+                        <a:rPr sz="880" b="0" dirty="0">
+                          <a:solidFill>
+                            <a:srgbClr val="262626"/>
+                          </a:solidFill>
+                          <a:latin typeface="NanumSquare Neo Regular" pitchFamily="2" charset="-127"/>
+                          <a:ea typeface="NanumSquare Neo Regular" pitchFamily="2" charset="-127"/>
+                        </a:rPr>
+                        <a:t> </a:t>
+                      </a:r>
+                      <a:r>
+                        <a:rPr sz="880" b="0" dirty="0" err="1">
+                          <a:solidFill>
+                            <a:srgbClr val="262626"/>
+                          </a:solidFill>
+                          <a:latin typeface="NanumSquare Neo Regular" pitchFamily="2" charset="-127"/>
+                          <a:ea typeface="NanumSquare Neo Regular" pitchFamily="2" charset="-127"/>
+                        </a:rPr>
+                        <a:t>상회</a:t>
+                      </a:r>
+                      <a:endParaRPr sz="880" b="0" dirty="0">
+                        <a:solidFill>
+                          <a:srgbClr val="262626"/>
+                        </a:solidFill>
+                        <a:latin typeface="NanumSquare Neo Regular" pitchFamily="2" charset="-127"/>
+                        <a:ea typeface="NanumSquare Neo Regular" pitchFamily="2" charset="-127"/>
+                      </a:endParaRPr>
                     </a:p>
                   </a:txBody>
-                  <a:tcPr marL="36576" marR="27432" marT="10972" marB="10972">
+                  <a:tcPr marL="36576" marR="27432" marT="10972" marB="10972" anchor="ctr">
                     <a:solidFill>
                       <a:srgbClr val="FFFFFF"/>
                     </a:solidFill>
@@ -4624,23 +5084,28 @@
                     <a:p>
                       <a:pPr algn="ctr"/>
                       <a:r>
-                        <a:rPr sz="880" b="0">
+                        <a:rPr sz="880" b="0" dirty="0">
                           <a:solidFill>
                             <a:srgbClr val="262626"/>
                           </a:solidFill>
-                          <a:latin typeface="Apple SD Gothic Neo"/>
-                          <a:ea typeface="Apple SD Gothic Neo"/>
+                          <a:latin typeface="NanumSquare Neo Regular" pitchFamily="2" charset="-127"/>
+                          <a:ea typeface="NanumSquare Neo Regular" pitchFamily="2" charset="-127"/>
                         </a:rPr>
                         <a:t>0.854</a:t>
                       </a:r>
                     </a:p>
                   </a:txBody>
-                  <a:tcPr marL="36576" marR="27432" marT="10972" marB="10972">
+                  <a:tcPr marL="36576" marR="27432" marT="10972" marB="10972" anchor="ctr">
                     <a:solidFill>
                       <a:srgbClr val="FFFFFF"/>
                     </a:solidFill>
                   </a:tcPr>
                 </a:tc>
+                <a:extLst>
+                  <a:ext uri="{0D108BD9-81ED-4DB2-BD59-A6C34878D82A}">
+                    <a16:rowId xmlns:a16="http://schemas.microsoft.com/office/drawing/2014/main" val="10006"/>
+                  </a:ext>
+                </a:extLst>
               </a:tr>
               <a:tr h="292608">
                 <a:tc>
@@ -4654,14 +5119,14 @@
                           <a:solidFill>
                             <a:srgbClr val="262626"/>
                           </a:solidFill>
-                          <a:latin typeface="Apple SD Gothic Neo"/>
-                          <a:ea typeface="Apple SD Gothic Neo"/>
+                          <a:latin typeface="NanumSquare Neo Regular" pitchFamily="2" charset="-127"/>
+                          <a:ea typeface="NanumSquare Neo Regular" pitchFamily="2" charset="-127"/>
                         </a:rPr>
                         <a:t>7</a:t>
                       </a:r>
                     </a:p>
                   </a:txBody>
-                  <a:tcPr marL="36576" marR="27432" marT="10972" marB="10972">
+                  <a:tcPr marL="36576" marR="27432" marT="10972" marB="10972" anchor="ctr">
                     <a:solidFill>
                       <a:srgbClr val="FFFFFF"/>
                     </a:solidFill>
@@ -4674,18 +5139,58 @@
                     <a:p>
                       <a:pPr algn="l"/>
                       <a:r>
-                        <a:rPr sz="880" b="0">
+                        <a:rPr sz="880" b="0" dirty="0">
                           <a:solidFill>
                             <a:srgbClr val="262626"/>
                           </a:solidFill>
-                          <a:latin typeface="Apple SD Gothic Neo"/>
-                          <a:ea typeface="Apple SD Gothic Neo"/>
-                        </a:rPr>
-                        <a:t>DFM 단독 (기준선)</a:t>
+                          <a:latin typeface="NanumSquare Neo Regular" pitchFamily="2" charset="-127"/>
+                          <a:ea typeface="NanumSquare Neo Regular" pitchFamily="2" charset="-127"/>
+                        </a:rPr>
+                        <a:t>DFM </a:t>
+                      </a:r>
+                      <a:r>
+                        <a:rPr sz="880" b="0" dirty="0" err="1">
+                          <a:solidFill>
+                            <a:srgbClr val="262626"/>
+                          </a:solidFill>
+                          <a:latin typeface="NanumSquare Neo Regular" pitchFamily="2" charset="-127"/>
+                          <a:ea typeface="NanumSquare Neo Regular" pitchFamily="2" charset="-127"/>
+                        </a:rPr>
+                        <a:t>단독</a:t>
+                      </a:r>
+                      <a:r>
+                        <a:rPr sz="880" b="0" dirty="0">
+                          <a:solidFill>
+                            <a:srgbClr val="262626"/>
+                          </a:solidFill>
+                          <a:latin typeface="NanumSquare Neo Regular" pitchFamily="2" charset="-127"/>
+                          <a:ea typeface="NanumSquare Neo Regular" pitchFamily="2" charset="-127"/>
+                        </a:rPr>
+                        <a:t> (</a:t>
+                      </a:r>
+                      <a:r>
+                        <a:rPr sz="880" b="0" dirty="0" err="1">
+                          <a:solidFill>
+                            <a:srgbClr val="262626"/>
+                          </a:solidFill>
+                          <a:latin typeface="NanumSquare Neo Regular" pitchFamily="2" charset="-127"/>
+                          <a:ea typeface="NanumSquare Neo Regular" pitchFamily="2" charset="-127"/>
+                        </a:rPr>
+                        <a:t>기준선</a:t>
+                      </a:r>
+                      <a:r>
+                        <a:rPr sz="880" b="0" dirty="0">
+                          <a:solidFill>
+                            <a:srgbClr val="262626"/>
+                          </a:solidFill>
+                          <a:latin typeface="NanumSquare Neo Regular" pitchFamily="2" charset="-127"/>
+                          <a:ea typeface="NanumSquare Neo Regular" pitchFamily="2" charset="-127"/>
+                        </a:rPr>
+                        <a:t>)</a:t>
                       </a:r>
                     </a:p>
                   </a:txBody>
-                  <a:tcPr marL="36576" marR="27432" marT="10972" marB="10972">
+                  <a:tcPr marL="36576" marR="27432" marT="10972" marB="10972" anchor="ctr">
                     <a:solidFill>
                       <a:srgbClr val="FFFFFF"/>
                     </a:solidFill>
@@ -4698,23 +5203,28 @@
                     <a:p>
                       <a:pPr algn="ctr"/>
                       <a:r>
-                        <a:rPr sz="880" b="0">
+                        <a:rPr sz="880" b="0" dirty="0">
                           <a:solidFill>
                             <a:srgbClr val="262626"/>
                           </a:solidFill>
-                          <a:latin typeface="Apple SD Gothic Neo"/>
-                          <a:ea typeface="Apple SD Gothic Neo"/>
+                          <a:latin typeface="NanumSquare Neo Regular" pitchFamily="2" charset="-127"/>
+                          <a:ea typeface="NanumSquare Neo Regular" pitchFamily="2" charset="-127"/>
                         </a:rPr>
                         <a:t>0.865</a:t>
                       </a:r>
                     </a:p>
                   </a:txBody>
-                  <a:tcPr marL="36576" marR="27432" marT="10972" marB="10972">
+                  <a:tcPr marL="36576" marR="27432" marT="10972" marB="10972" anchor="ctr">
                     <a:solidFill>
                       <a:srgbClr val="FFFFFF"/>
                     </a:solidFill>
                   </a:tcPr>
                 </a:tc>
+                <a:extLst>
+                  <a:ext uri="{0D108BD9-81ED-4DB2-BD59-A6C34878D82A}">
+                    <a16:rowId xmlns:a16="http://schemas.microsoft.com/office/drawing/2014/main" val="10007"/>
+                  </a:ext>
+                </a:extLst>
               </a:tr>
               <a:tr h="292608">
                 <a:tc>
@@ -4728,14 +5238,14 @@
                           <a:solidFill>
                             <a:srgbClr val="262626"/>
                           </a:solidFill>
-                          <a:latin typeface="Apple SD Gothic Neo"/>
-                          <a:ea typeface="Apple SD Gothic Neo"/>
+                          <a:latin typeface="NanumSquare Neo Regular" pitchFamily="2" charset="-127"/>
+                          <a:ea typeface="NanumSquare Neo Regular" pitchFamily="2" charset="-127"/>
                         </a:rPr>
                         <a:t>8</a:t>
                       </a:r>
                     </a:p>
                   </a:txBody>
-                  <a:tcPr marL="36576" marR="27432" marT="10972" marB="10972">
+                  <a:tcPr marL="36576" marR="27432" marT="10972" marB="10972" anchor="ctr">
                     <a:solidFill>
                       <a:srgbClr val="FFFFFF"/>
                     </a:solidFill>
@@ -4748,18 +5258,58 @@
                     <a:p>
                       <a:pPr algn="l"/>
                       <a:r>
-                        <a:rPr sz="880" b="0">
+                        <a:rPr sz="880" b="0" dirty="0">
                           <a:solidFill>
                             <a:srgbClr val="262626"/>
                           </a:solidFill>
-                          <a:latin typeface="Apple SD Gothic Neo"/>
-                          <a:ea typeface="Apple SD Gothic Neo"/>
-                        </a:rPr>
-                        <a:t>DFM+D2FM (딥러닝 요인모형)</a:t>
+                          <a:latin typeface="NanumSquare Neo Regular" pitchFamily="2" charset="-127"/>
+                          <a:ea typeface="NanumSquare Neo Regular" pitchFamily="2" charset="-127"/>
+                        </a:rPr>
+                        <a:t>DFM+D2FM (</a:t>
+                      </a:r>
+                      <a:r>
+                        <a:rPr sz="880" b="0" dirty="0" err="1">
+                          <a:solidFill>
+                            <a:srgbClr val="262626"/>
+                          </a:solidFill>
+                          <a:latin typeface="NanumSquare Neo Regular" pitchFamily="2" charset="-127"/>
+                          <a:ea typeface="NanumSquare Neo Regular" pitchFamily="2" charset="-127"/>
+                        </a:rPr>
+                        <a:t>딥러닝</a:t>
+                      </a:r>
+                      <a:r>
+                        <a:rPr sz="880" b="0" dirty="0">
+                          <a:solidFill>
+                            <a:srgbClr val="262626"/>
+                          </a:solidFill>
+                          <a:latin typeface="NanumSquare Neo Regular" pitchFamily="2" charset="-127"/>
+                          <a:ea typeface="NanumSquare Neo Regular" pitchFamily="2" charset="-127"/>
+                        </a:rPr>
+                        <a:t> </a:t>
+                      </a:r>
+                      <a:r>
+                        <a:rPr sz="880" b="0" dirty="0" err="1">
+                          <a:solidFill>
+                            <a:srgbClr val="262626"/>
+                          </a:solidFill>
+                          <a:latin typeface="NanumSquare Neo Regular" pitchFamily="2" charset="-127"/>
+                          <a:ea typeface="NanumSquare Neo Regular" pitchFamily="2" charset="-127"/>
+                        </a:rPr>
+                        <a:t>요인모형</a:t>
+                      </a:r>
+                      <a:r>
+                        <a:rPr sz="880" b="0" dirty="0">
+                          <a:solidFill>
+                            <a:srgbClr val="262626"/>
+                          </a:solidFill>
+                          <a:latin typeface="NanumSquare Neo Regular" pitchFamily="2" charset="-127"/>
+                          <a:ea typeface="NanumSquare Neo Regular" pitchFamily="2" charset="-127"/>
+                        </a:rPr>
+                        <a:t>)</a:t>
                       </a:r>
                     </a:p>
                   </a:txBody>
-                  <a:tcPr marL="36576" marR="27432" marT="10972" marB="10972">
+                  <a:tcPr marL="36576" marR="27432" marT="10972" marB="10972" anchor="ctr">
                     <a:solidFill>
                       <a:srgbClr val="FFFFFF"/>
                     </a:solidFill>
@@ -4772,23 +5322,28 @@
                     <a:p>
                       <a:pPr algn="ctr"/>
                       <a:r>
-                        <a:rPr sz="880" b="0">
+                        <a:rPr sz="880" b="0" dirty="0">
                           <a:solidFill>
                             <a:srgbClr val="262626"/>
                           </a:solidFill>
-                          <a:latin typeface="Apple SD Gothic Neo"/>
-                          <a:ea typeface="Apple SD Gothic Neo"/>
+                          <a:latin typeface="NanumSquare Neo Regular" pitchFamily="2" charset="-127"/>
+                          <a:ea typeface="NanumSquare Neo Regular" pitchFamily="2" charset="-127"/>
                         </a:rPr>
                         <a:t>0.868</a:t>
                       </a:r>
                     </a:p>
                   </a:txBody>
-                  <a:tcPr marL="36576" marR="27432" marT="10972" marB="10972">
+                  <a:tcPr marL="36576" marR="27432" marT="10972" marB="10972" anchor="ctr">
                     <a:solidFill>
                       <a:srgbClr val="FFFFFF"/>
                     </a:solidFill>
                   </a:tcPr>
                 </a:tc>
+                <a:extLst>
+                  <a:ext uri="{0D108BD9-81ED-4DB2-BD59-A6C34878D82A}">
+                    <a16:rowId xmlns:a16="http://schemas.microsoft.com/office/drawing/2014/main" val="10008"/>
+                  </a:ext>
+                </a:extLst>
               </a:tr>
               <a:tr h="292608">
                 <a:tc>
@@ -4802,14 +5357,14 @@
                           <a:solidFill>
                             <a:srgbClr val="9A9A9A"/>
                           </a:solidFill>
-                          <a:latin typeface="Apple SD Gothic Neo"/>
-                          <a:ea typeface="Apple SD Gothic Neo"/>
+                          <a:latin typeface="NanumSquare Neo Regular" pitchFamily="2" charset="-127"/>
+                          <a:ea typeface="NanumSquare Neo Regular" pitchFamily="2" charset="-127"/>
                         </a:rPr>
                         <a:t>…</a:t>
                       </a:r>
                     </a:p>
                   </a:txBody>
-                  <a:tcPr marL="36576" marR="27432" marT="10972" marB="10972">
+                  <a:tcPr marL="36576" marR="27432" marT="10972" marB="10972" anchor="ctr">
                     <a:solidFill>
                       <a:srgbClr val="FFFFFF"/>
                     </a:solidFill>
@@ -4822,18 +5377,68 @@
                     <a:p>
                       <a:pPr algn="l"/>
                       <a:r>
-                        <a:rPr sz="880" b="0">
+                        <a:rPr sz="880" b="0" dirty="0" err="1">
                           <a:solidFill>
                             <a:srgbClr val="9A9A9A"/>
                           </a:solidFill>
-                          <a:latin typeface="Apple SD Gothic Neo"/>
-                          <a:ea typeface="Apple SD Gothic Neo"/>
-                        </a:rPr>
-                        <a:t>AttnLSTM·NCDE 등 자체학습 DL (21~24위)</a:t>
+                          <a:latin typeface="NanumSquare Neo Regular" pitchFamily="2" charset="-127"/>
+                          <a:ea typeface="NanumSquare Neo Regular" pitchFamily="2" charset="-127"/>
+                        </a:rPr>
+                        <a:t>AttnLSTM·NCDE</a:t>
+                      </a:r>
+                      <a:r>
+                        <a:rPr sz="880" b="0" dirty="0">
+                          <a:solidFill>
+                            <a:srgbClr val="9A9A9A"/>
+                          </a:solidFill>
+                          <a:latin typeface="NanumSquare Neo Regular" pitchFamily="2" charset="-127"/>
+                          <a:ea typeface="NanumSquare Neo Regular" pitchFamily="2" charset="-127"/>
+                        </a:rPr>
+                        <a:t> </a:t>
+                      </a:r>
+                      <a:r>
+                        <a:rPr sz="880" b="0" dirty="0" err="1">
+                          <a:solidFill>
+                            <a:srgbClr val="9A9A9A"/>
+                          </a:solidFill>
+                          <a:latin typeface="NanumSquare Neo Regular" pitchFamily="2" charset="-127"/>
+                          <a:ea typeface="NanumSquare Neo Regular" pitchFamily="2" charset="-127"/>
+                        </a:rPr>
+                        <a:t>등</a:t>
+                      </a:r>
+                      <a:r>
+                        <a:rPr sz="880" b="0" dirty="0">
+                          <a:solidFill>
+                            <a:srgbClr val="9A9A9A"/>
+                          </a:solidFill>
+                          <a:latin typeface="NanumSquare Neo Regular" pitchFamily="2" charset="-127"/>
+                          <a:ea typeface="NanumSquare Neo Regular" pitchFamily="2" charset="-127"/>
+                        </a:rPr>
+                        <a:t> </a:t>
+                      </a:r>
+                      <a:r>
+                        <a:rPr sz="880" b="0" dirty="0" err="1">
+                          <a:solidFill>
+                            <a:srgbClr val="9A9A9A"/>
+                          </a:solidFill>
+                          <a:latin typeface="NanumSquare Neo Regular" pitchFamily="2" charset="-127"/>
+                          <a:ea typeface="NanumSquare Neo Regular" pitchFamily="2" charset="-127"/>
+                        </a:rPr>
+                        <a:t>자체학습</a:t>
+                      </a:r>
+                      <a:r>
+                        <a:rPr sz="880" b="0" dirty="0">
+                          <a:solidFill>
+                            <a:srgbClr val="9A9A9A"/>
+                          </a:solidFill>
+                          <a:latin typeface="NanumSquare Neo Regular" pitchFamily="2" charset="-127"/>
+                          <a:ea typeface="NanumSquare Neo Regular" pitchFamily="2" charset="-127"/>
+                        </a:rPr>
+                        <a:t> DL (21~24위)</a:t>
                       </a:r>
                     </a:p>
                   </a:txBody>
-                  <a:tcPr marL="36576" marR="27432" marT="10972" marB="10972">
+                  <a:tcPr marL="36576" marR="27432" marT="10972" marB="10972" anchor="ctr">
                     <a:solidFill>
                       <a:srgbClr val="FFFFFF"/>
                     </a:solidFill>
@@ -4846,23 +5451,28 @@
                     <a:p>
                       <a:pPr algn="ctr"/>
                       <a:r>
-                        <a:rPr sz="880" b="0">
+                        <a:rPr sz="880" b="0" dirty="0">
                           <a:solidFill>
                             <a:srgbClr val="9A9A9A"/>
                           </a:solidFill>
-                          <a:latin typeface="Apple SD Gothic Neo"/>
-                          <a:ea typeface="Apple SD Gothic Neo"/>
+                          <a:latin typeface="NanumSquare Neo Regular" pitchFamily="2" charset="-127"/>
+                          <a:ea typeface="NanumSquare Neo Regular" pitchFamily="2" charset="-127"/>
                         </a:rPr>
                         <a:t>1.09~1.28</a:t>
                       </a:r>
                     </a:p>
                   </a:txBody>
-                  <a:tcPr marL="36576" marR="27432" marT="10972" marB="10972">
+                  <a:tcPr marL="36576" marR="27432" marT="10972" marB="10972" anchor="ctr">
                     <a:solidFill>
                       <a:srgbClr val="FFFFFF"/>
                     </a:solidFill>
                   </a:tcPr>
                 </a:tc>
+                <a:extLst>
+                  <a:ext uri="{0D108BD9-81ED-4DB2-BD59-A6C34878D82A}">
+                    <a16:rowId xmlns:a16="http://schemas.microsoft.com/office/drawing/2014/main" val="10009"/>
+                  </a:ext>
+                </a:extLst>
               </a:tr>
               <a:tr h="292608">
                 <a:tc>
@@ -4876,14 +5486,14 @@
                           <a:solidFill>
                             <a:srgbClr val="9A9A9A"/>
                           </a:solidFill>
-                          <a:latin typeface="Apple SD Gothic Neo"/>
-                          <a:ea typeface="Apple SD Gothic Neo"/>
+                          <a:latin typeface="NanumSquare Neo Regular" pitchFamily="2" charset="-127"/>
+                          <a:ea typeface="NanumSquare Neo Regular" pitchFamily="2" charset="-127"/>
                         </a:rPr>
                         <a:t>25</a:t>
                       </a:r>
                     </a:p>
                   </a:txBody>
-                  <a:tcPr marL="36576" marR="27432" marT="10972" marB="10972">
+                  <a:tcPr marL="36576" marR="27432" marT="10972" marB="10972" anchor="ctr">
                     <a:solidFill>
                       <a:srgbClr val="FFFFFF"/>
                     </a:solidFill>
@@ -4896,18 +5506,38 @@
                     <a:p>
                       <a:pPr algn="l"/>
                       <a:r>
-                        <a:rPr sz="880" b="0">
+                        <a:rPr sz="880" b="0" dirty="0">
                           <a:solidFill>
                             <a:srgbClr val="9A9A9A"/>
                           </a:solidFill>
-                          <a:latin typeface="Apple SD Gothic Neo"/>
-                          <a:ea typeface="Apple SD Gothic Neo"/>
-                        </a:rPr>
-                        <a:t>Chronos 파운데이션 (zero-shot)</a:t>
+                          <a:latin typeface="NanumSquare Neo Regular" pitchFamily="2" charset="-127"/>
+                          <a:ea typeface="NanumSquare Neo Regular" pitchFamily="2" charset="-127"/>
+                        </a:rPr>
+                        <a:t>Chronos </a:t>
+                      </a:r>
+                      <a:r>
+                        <a:rPr sz="880" b="0" dirty="0" err="1">
+                          <a:solidFill>
+                            <a:srgbClr val="9A9A9A"/>
+                          </a:solidFill>
+                          <a:latin typeface="NanumSquare Neo Regular" pitchFamily="2" charset="-127"/>
+                          <a:ea typeface="NanumSquare Neo Regular" pitchFamily="2" charset="-127"/>
+                        </a:rPr>
+                        <a:t>파운데이션</a:t>
+                      </a:r>
+                      <a:r>
+                        <a:rPr sz="880" b="0" dirty="0">
+                          <a:solidFill>
+                            <a:srgbClr val="9A9A9A"/>
+                          </a:solidFill>
+                          <a:latin typeface="NanumSquare Neo Regular" pitchFamily="2" charset="-127"/>
+                          <a:ea typeface="NanumSquare Neo Regular" pitchFamily="2" charset="-127"/>
+                        </a:rPr>
+                        <a:t> (zero-shot)</a:t>
                       </a:r>
                     </a:p>
                   </a:txBody>
-                  <a:tcPr marL="36576" marR="27432" marT="10972" marB="10972">
+                  <a:tcPr marL="36576" marR="27432" marT="10972" marB="10972" anchor="ctr">
                     <a:solidFill>
                       <a:srgbClr val="FFFFFF"/>
                     </a:solidFill>
@@ -4920,23 +5550,28 @@
                     <a:p>
                       <a:pPr algn="ctr"/>
                       <a:r>
-                        <a:rPr sz="880" b="0">
+                        <a:rPr sz="880" b="0" dirty="0">
                           <a:solidFill>
                             <a:srgbClr val="9A9A9A"/>
                           </a:solidFill>
-                          <a:latin typeface="Apple SD Gothic Neo"/>
-                          <a:ea typeface="Apple SD Gothic Neo"/>
+                          <a:latin typeface="NanumSquare Neo Regular" pitchFamily="2" charset="-127"/>
+                          <a:ea typeface="NanumSquare Neo Regular" pitchFamily="2" charset="-127"/>
                         </a:rPr>
                         <a:t>1.351</a:t>
                       </a:r>
                     </a:p>
                   </a:txBody>
-                  <a:tcPr marL="36576" marR="27432" marT="10972" marB="10972">
+                  <a:tcPr marL="36576" marR="27432" marT="10972" marB="10972" anchor="ctr">
                     <a:solidFill>
                       <a:srgbClr val="FFFFFF"/>
                     </a:solidFill>
                   </a:tcPr>
                 </a:tc>
+                <a:extLst>
+                  <a:ext uri="{0D108BD9-81ED-4DB2-BD59-A6C34878D82A}">
+                    <a16:rowId xmlns:a16="http://schemas.microsoft.com/office/drawing/2014/main" val="10010"/>
+                  </a:ext>
+                </a:extLst>
               </a:tr>
               <a:tr h="292608">
                 <a:tc>
@@ -4950,14 +5585,14 @@
                           <a:solidFill>
                             <a:srgbClr val="9A9A9A"/>
                           </a:solidFill>
-                          <a:latin typeface="Apple SD Gothic Neo"/>
-                          <a:ea typeface="Apple SD Gothic Neo"/>
+                          <a:latin typeface="NanumSquare Neo Regular" pitchFamily="2" charset="-127"/>
+                          <a:ea typeface="NanumSquare Neo Regular" pitchFamily="2" charset="-127"/>
                         </a:rPr>
                         <a:t>26</a:t>
                       </a:r>
                     </a:p>
                   </a:txBody>
-                  <a:tcPr marL="36576" marR="27432" marT="10972" marB="10972">
+                  <a:tcPr marL="36576" marR="27432" marT="10972" marB="10972" anchor="ctr">
                     <a:solidFill>
                       <a:srgbClr val="FFFFFF"/>
                     </a:solidFill>
@@ -4970,18 +5605,38 @@
                     <a:p>
                       <a:pPr algn="l"/>
                       <a:r>
-                        <a:rPr sz="880" b="0">
+                        <a:rPr sz="880" b="0" dirty="0">
                           <a:solidFill>
                             <a:srgbClr val="9A9A9A"/>
                           </a:solidFill>
-                          <a:latin typeface="Apple SD Gothic Neo"/>
-                          <a:ea typeface="Apple SD Gothic Neo"/>
-                        </a:rPr>
-                        <a:t>Moirai 파운데이션 (zero-shot)</a:t>
+                          <a:latin typeface="NanumSquare Neo Regular" pitchFamily="2" charset="-127"/>
+                          <a:ea typeface="NanumSquare Neo Regular" pitchFamily="2" charset="-127"/>
+                        </a:rPr>
+                        <a:t>Moirai </a:t>
+                      </a:r>
+                      <a:r>
+                        <a:rPr sz="880" b="0" dirty="0" err="1">
+                          <a:solidFill>
+                            <a:srgbClr val="9A9A9A"/>
+                          </a:solidFill>
+                          <a:latin typeface="NanumSquare Neo Regular" pitchFamily="2" charset="-127"/>
+                          <a:ea typeface="NanumSquare Neo Regular" pitchFamily="2" charset="-127"/>
+                        </a:rPr>
+                        <a:t>파운데이션</a:t>
+                      </a:r>
+                      <a:r>
+                        <a:rPr sz="880" b="0" dirty="0">
+                          <a:solidFill>
+                            <a:srgbClr val="9A9A9A"/>
+                          </a:solidFill>
+                          <a:latin typeface="NanumSquare Neo Regular" pitchFamily="2" charset="-127"/>
+                          <a:ea typeface="NanumSquare Neo Regular" pitchFamily="2" charset="-127"/>
+                        </a:rPr>
+                        <a:t> (zero-shot)</a:t>
                       </a:r>
                     </a:p>
                   </a:txBody>
-                  <a:tcPr marL="36576" marR="27432" marT="10972" marB="10972">
+                  <a:tcPr marL="36576" marR="27432" marT="10972" marB="10972" anchor="ctr">
                     <a:solidFill>
                       <a:srgbClr val="FFFFFF"/>
                     </a:solidFill>
@@ -4994,23 +5649,28 @@
                     <a:p>
                       <a:pPr algn="ctr"/>
                       <a:r>
-                        <a:rPr sz="880" b="0">
+                        <a:rPr sz="880" b="0" dirty="0">
                           <a:solidFill>
                             <a:srgbClr val="9A9A9A"/>
                           </a:solidFill>
-                          <a:latin typeface="Apple SD Gothic Neo"/>
-                          <a:ea typeface="Apple SD Gothic Neo"/>
+                          <a:latin typeface="NanumSquare Neo Regular" pitchFamily="2" charset="-127"/>
+                          <a:ea typeface="NanumSquare Neo Regular" pitchFamily="2" charset="-127"/>
                         </a:rPr>
                         <a:t>1.453</a:t>
                       </a:r>
                     </a:p>
                   </a:txBody>
-                  <a:tcPr marL="36576" marR="27432" marT="10972" marB="10972">
+                  <a:tcPr marL="36576" marR="27432" marT="10972" marB="10972" anchor="ctr">
                     <a:solidFill>
                       <a:srgbClr val="FFFFFF"/>
                     </a:solidFill>
                   </a:tcPr>
                 </a:tc>
+                <a:extLst>
+                  <a:ext uri="{0D108BD9-81ED-4DB2-BD59-A6C34878D82A}">
+                    <a16:rowId xmlns:a16="http://schemas.microsoft.com/office/drawing/2014/main" val="10011"/>
+                  </a:ext>
+                </a:extLst>
               </a:tr>
             </a:tbl>
           </a:graphicData>
@@ -5025,7 +5685,7 @@
         <p:spPr>
           <a:xfrm>
             <a:off x="4315968" y="5715000"/>
-            <a:ext cx="3977639" cy="548640"/>
+            <a:ext cx="3977639" cy="336502"/>
           </a:xfrm>
           <a:prstGeom prst="rect">
             <a:avLst/>
@@ -5033,7 +5693,7 @@
           <a:noFill/>
         </p:spPr>
         <p:txBody>
-          <a:bodyPr wrap="square" anchor="t" lIns="45720" rIns="45720" tIns="18288" bIns="18288">
+          <a:bodyPr wrap="square" lIns="45720" tIns="18288" rIns="45720" bIns="18288" anchor="t">
             <a:spAutoFit/>
           </a:bodyPr>
           <a:lstStyle/>
@@ -5048,8 +5708,8 @@
                 <a:solidFill>
                   <a:srgbClr val="262626"/>
                 </a:solidFill>
-                <a:latin typeface="Apple SD Gothic Neo"/>
-                <a:ea typeface="Apple SD Gothic Neo"/>
+                <a:latin typeface="NanumSquare Neo Regular" pitchFamily="2" charset="-127"/>
+                <a:ea typeface="NanumSquare Neo Regular" pitchFamily="2" charset="-127"/>
               </a:rPr>
               <a:t>· 통계 검정: 제안 v3 vs 기존 최고, DM p=0.088 (10% 수준 유의)</a:t>
             </a:r>
@@ -5065,8 +5725,8 @@
                 <a:solidFill>
                   <a:srgbClr val="6B6B6B"/>
                 </a:solidFill>
-                <a:latin typeface="Apple SD Gothic Neo"/>
-                <a:ea typeface="Apple SD Gothic Neo"/>
+                <a:latin typeface="NanumSquare Neo Regular" pitchFamily="2" charset="-127"/>
+                <a:ea typeface="NanumSquare Neo Regular" pitchFamily="2" charset="-127"/>
               </a:rPr>
               <a:t>· 하위권 공통점: 소표본 자체학습 DL·무보정(zero-shot) 대형 모델</a:t>
             </a:r>
@@ -5082,7 +5742,7 @@
         <p:spPr>
           <a:xfrm>
             <a:off x="8613648" y="1417320"/>
-            <a:ext cx="3072384" cy="310896"/>
+            <a:ext cx="3072384" cy="236988"/>
           </a:xfrm>
           <a:prstGeom prst="rect">
             <a:avLst/>
@@ -5090,7 +5750,7 @@
           <a:noFill/>
         </p:spPr>
         <p:txBody>
-          <a:bodyPr wrap="square" anchor="t" lIns="45720" rIns="45720" tIns="18288" bIns="18288">
+          <a:bodyPr wrap="square" lIns="45720" tIns="18288" rIns="45720" bIns="18288" anchor="t">
             <a:spAutoFit/>
           </a:bodyPr>
           <a:lstStyle/>
@@ -5105,8 +5765,8 @@
                 <a:solidFill>
                   <a:srgbClr val="008A3E"/>
                 </a:solidFill>
-                <a:latin typeface="Apple SD Gothic Neo"/>
-                <a:ea typeface="Apple SD Gothic Neo"/>
+                <a:latin typeface="NanumSquare Neo Regular" pitchFamily="2" charset="-127"/>
+                <a:ea typeface="NanumSquare Neo Regular" pitchFamily="2" charset="-127"/>
               </a:rPr>
               <a:t>03  </a:t>
             </a:r>
@@ -5115,8 +5775,8 @@
                 <a:solidFill>
                   <a:srgbClr val="243447"/>
                 </a:solidFill>
-                <a:latin typeface="Apple SD Gothic Neo"/>
-                <a:ea typeface="Apple SD Gothic Neo"/>
+                <a:latin typeface="NanumSquare Neo Regular" pitchFamily="2" charset="-127"/>
+                <a:ea typeface="NanumSquare Neo Regular" pitchFamily="2" charset="-127"/>
               </a:rPr>
               <a:t>검증 방식과 시사점</a:t>
             </a:r>
@@ -5167,7 +5827,7 @@
         <p:spPr>
           <a:xfrm>
             <a:off x="8613648" y="1837944"/>
-            <a:ext cx="3072384" cy="2103120"/>
+            <a:ext cx="3072384" cy="1720471"/>
           </a:xfrm>
           <a:prstGeom prst="rect">
             <a:avLst/>
@@ -5175,7 +5835,7 @@
           <a:noFill/>
         </p:spPr>
         <p:txBody>
-          <a:bodyPr wrap="square" anchor="t" lIns="45720" rIns="45720" tIns="18288" bIns="18288">
+          <a:bodyPr wrap="square" lIns="45720" tIns="18288" rIns="45720" bIns="18288" anchor="t">
             <a:spAutoFit/>
           </a:bodyPr>
           <a:lstStyle/>
@@ -5190,8 +5850,8 @@
                 <a:solidFill>
                   <a:srgbClr val="262626"/>
                 </a:solidFill>
-                <a:latin typeface="Apple SD Gothic Neo"/>
-                <a:ea typeface="Apple SD Gothic Neo"/>
+                <a:latin typeface="NanumSquare Neo Regular" pitchFamily="2" charset="-127"/>
+                <a:ea typeface="NanumSquare Neo Regular" pitchFamily="2" charset="-127"/>
               </a:rPr>
               <a:t>전수 검증 원칙</a:t>
             </a:r>
@@ -5207,8 +5867,8 @@
                 <a:solidFill>
                   <a:srgbClr val="262626"/>
                 </a:solidFill>
-                <a:latin typeface="Apple SD Gothic Neo"/>
-                <a:ea typeface="Apple SD Gothic Neo"/>
+                <a:latin typeface="NanumSquare Neo Regular" pitchFamily="2" charset="-127"/>
+                <a:ea typeface="NanumSquare Neo Regular" pitchFamily="2" charset="-127"/>
               </a:rPr>
               <a:t>· 12개 아키텍처·26개 구성을 전부 동일 조건</a:t>
             </a:r>
@@ -5224,8 +5884,8 @@
                 <a:solidFill>
                   <a:srgbClr val="262626"/>
                 </a:solidFill>
-                <a:latin typeface="Apple SD Gothic Neo"/>
-                <a:ea typeface="Apple SD Gothic Neo"/>
+                <a:latin typeface="NanumSquare Neo Regular" pitchFamily="2" charset="-127"/>
+                <a:ea typeface="NanumSquare Neo Regular" pitchFamily="2" charset="-127"/>
               </a:rPr>
               <a:t>  (동일 데이터·기간·walk-forward)에서 비교</a:t>
             </a:r>
@@ -5241,8 +5901,8 @@
                 <a:solidFill>
                   <a:srgbClr val="262626"/>
                 </a:solidFill>
-                <a:latin typeface="Apple SD Gothic Neo"/>
-                <a:ea typeface="Apple SD Gothic Neo"/>
+                <a:latin typeface="NanumSquare Neo Regular" pitchFamily="2" charset="-127"/>
+                <a:ea typeface="NanumSquare Neo Regular" pitchFamily="2" charset="-127"/>
               </a:rPr>
               <a:t>· 기존 성과(DFM 0.865, DFM+XGB 0.765)를</a:t>
             </a:r>
@@ -5258,8 +5918,8 @@
                 <a:solidFill>
                   <a:srgbClr val="262626"/>
                 </a:solidFill>
-                <a:latin typeface="Apple SD Gothic Neo"/>
-                <a:ea typeface="Apple SD Gothic Neo"/>
+                <a:latin typeface="NanumSquare Neo Regular" pitchFamily="2" charset="-127"/>
+                <a:ea typeface="NanumSquare Neo Regular" pitchFamily="2" charset="-127"/>
               </a:rPr>
               <a:t>  소수점 수준 재현한 뒤에만 개선 논의</a:t>
             </a:r>
@@ -5275,8 +5935,8 @@
                 <a:solidFill>
                   <a:srgbClr val="262626"/>
                 </a:solidFill>
-                <a:latin typeface="Apple SD Gothic Neo"/>
-                <a:ea typeface="Apple SD Gothic Neo"/>
+                <a:latin typeface="NanumSquare Neo Regular" pitchFamily="2" charset="-127"/>
+                <a:ea typeface="NanumSquare Neo Regular" pitchFamily="2" charset="-127"/>
               </a:rPr>
               <a:t>딥러닝의 자리</a:t>
             </a:r>
@@ -5292,8 +5952,8 @@
                 <a:solidFill>
                   <a:srgbClr val="262626"/>
                 </a:solidFill>
-                <a:latin typeface="Apple SD Gothic Neo"/>
-                <a:ea typeface="Apple SD Gothic Neo"/>
+                <a:latin typeface="NanumSquare Neo Regular" pitchFamily="2" charset="-127"/>
+                <a:ea typeface="NanumSquare Neo Regular" pitchFamily="2" charset="-127"/>
               </a:rPr>
               <a:t>· 소표본에서 자체학습 DL은 전패 —</a:t>
             </a:r>
@@ -5309,8 +5969,8 @@
                 <a:solidFill>
                   <a:srgbClr val="262626"/>
                 </a:solidFill>
-                <a:latin typeface="Apple SD Gothic Neo"/>
-                <a:ea typeface="Apple SD Gothic Neo"/>
+                <a:latin typeface="NanumSquare Neo Regular" pitchFamily="2" charset="-127"/>
+                <a:ea typeface="NanumSquare Neo Regular" pitchFamily="2" charset="-127"/>
               </a:rPr>
               <a:t>  "안 해본 게 아니라 다 검증한 결론"</a:t>
             </a:r>
@@ -5326,8 +5986,8 @@
                 <a:solidFill>
                   <a:srgbClr val="262626"/>
                 </a:solidFill>
-                <a:latin typeface="Apple SD Gothic Neo"/>
-                <a:ea typeface="Apple SD Gothic Neo"/>
+                <a:latin typeface="NanumSquare Neo Regular" pitchFamily="2" charset="-127"/>
+                <a:ea typeface="NanumSquare Neo Regular" pitchFamily="2" charset="-127"/>
               </a:rPr>
               <a:t>· 생존 계열은 사전학습+소량적응(TTM·TabPFN)</a:t>
             </a:r>
@@ -5343,8 +6003,8 @@
                 <a:solidFill>
                   <a:srgbClr val="262626"/>
                 </a:solidFill>
-                <a:latin typeface="Apple SD Gothic Neo"/>
-                <a:ea typeface="Apple SD Gothic Neo"/>
+                <a:latin typeface="NanumSquare Neo Regular" pitchFamily="2" charset="-127"/>
+                <a:ea typeface="NanumSquare Neo Regular" pitchFamily="2" charset="-127"/>
               </a:rPr>
               <a:t>  뿐이며, 가치는 반등 국면 보완에 집중</a:t>
             </a:r>
@@ -5360,7 +6020,7 @@
         <p:spPr>
           <a:xfrm>
             <a:off x="8613648" y="4069080"/>
-            <a:ext cx="3072384" cy="1737360"/>
+            <a:ext cx="3072384" cy="1203406"/>
           </a:xfrm>
           <a:prstGeom prst="rect">
             <a:avLst/>
@@ -5368,7 +6028,7 @@
           <a:noFill/>
         </p:spPr>
         <p:txBody>
-          <a:bodyPr wrap="square" anchor="t" lIns="45720" rIns="45720" tIns="18288" bIns="18288">
+          <a:bodyPr wrap="square" lIns="45720" tIns="18288" rIns="45720" bIns="18288" anchor="t">
             <a:spAutoFit/>
           </a:bodyPr>
           <a:lstStyle/>
@@ -5383,8 +6043,8 @@
                 <a:solidFill>
                   <a:srgbClr val="262626"/>
                 </a:solidFill>
-                <a:latin typeface="Apple SD Gothic Neo"/>
-                <a:ea typeface="Apple SD Gothic Neo"/>
+                <a:latin typeface="NanumSquare Neo Regular" pitchFamily="2" charset="-127"/>
+                <a:ea typeface="NanumSquare Neo Regular" pitchFamily="2" charset="-127"/>
               </a:rPr>
               <a:t>향후 계획</a:t>
             </a:r>
@@ -5400,8 +6060,8 @@
                 <a:solidFill>
                   <a:srgbClr val="262626"/>
                 </a:solidFill>
-                <a:latin typeface="Apple SD Gothic Neo"/>
-                <a:ea typeface="Apple SD Gothic Neo"/>
+                <a:latin typeface="NanumSquare Neo Regular" pitchFamily="2" charset="-127"/>
+                <a:ea typeface="NanumSquare Neo Regular" pitchFamily="2" charset="-127"/>
               </a:rPr>
               <a:t>1) v3 강건성 스윕·유의성 보강 후 정식 제안</a:t>
             </a:r>
@@ -5417,8 +6077,8 @@
                 <a:solidFill>
                   <a:srgbClr val="262626"/>
                 </a:solidFill>
-                <a:latin typeface="Apple SD Gothic Neo"/>
-                <a:ea typeface="Apple SD Gothic Neo"/>
+                <a:latin typeface="NanumSquare Neo Regular" pitchFamily="2" charset="-127"/>
+                <a:ea typeface="NanumSquare Neo Regular" pitchFamily="2" charset="-127"/>
               </a:rPr>
               <a:t>2) 충격탐지 고도화 (월별지표 조기감지,</a:t>
             </a:r>
@@ -5434,8 +6094,8 @@
                 <a:solidFill>
                   <a:srgbClr val="262626"/>
                 </a:solidFill>
-                <a:latin typeface="Apple SD Gothic Neo"/>
-                <a:ea typeface="Apple SD Gothic Neo"/>
+                <a:latin typeface="NanumSquare Neo Regular" pitchFamily="2" charset="-127"/>
+                <a:ea typeface="NanumSquare Neo Regular" pitchFamily="2" charset="-127"/>
               </a:rPr>
               <a:t>    MS-DFM·딥러닝 신호 통합)</a:t>
             </a:r>
@@ -5451,8 +6111,8 @@
                 <a:solidFill>
                   <a:srgbClr val="262626"/>
                 </a:solidFill>
-                <a:latin typeface="Apple SD Gothic Neo"/>
-                <a:ea typeface="Apple SD Gothic Neo"/>
+                <a:latin typeface="NanumSquare Neo Regular" pitchFamily="2" charset="-127"/>
+                <a:ea typeface="NanumSquare Neo Regular" pitchFamily="2" charset="-127"/>
               </a:rPr>
               <a:t>3) 설명가능성(XAI) 레이어 — 전망 근거를</a:t>
             </a:r>
@@ -5468,8 +6128,8 @@
                 <a:solidFill>
                   <a:srgbClr val="262626"/>
                 </a:solidFill>
-                <a:latin typeface="Apple SD Gothic Neo"/>
-                <a:ea typeface="Apple SD Gothic Neo"/>
+                <a:latin typeface="NanumSquare Neo Regular" pitchFamily="2" charset="-127"/>
+                <a:ea typeface="NanumSquare Neo Regular" pitchFamily="2" charset="-127"/>
               </a:rPr>
               <a:t>    변수·경로 단위로 자동 서술</a:t>
             </a:r>
@@ -5485,8 +6145,8 @@
                 <a:solidFill>
                   <a:srgbClr val="262626"/>
                 </a:solidFill>
-                <a:latin typeface="Apple SD Gothic Neo"/>
-                <a:ea typeface="Apple SD Gothic Neo"/>
+                <a:latin typeface="NanumSquare Neo Regular" pitchFamily="2" charset="-127"/>
+                <a:ea typeface="NanumSquare Neo Regular" pitchFamily="2" charset="-127"/>
               </a:rPr>
               <a:t>4) 뉴스 텍스트 기반 국면 판정 벤치마크</a:t>
             </a:r>
@@ -5501,8 +6161,8 @@
         </p:nvSpPr>
         <p:spPr>
           <a:xfrm>
-            <a:off x="502920" y="6053328"/>
-            <a:ext cx="11183112" cy="512064"/>
+            <a:off x="502920" y="6118982"/>
+            <a:ext cx="11183112" cy="446409"/>
           </a:xfrm>
           <a:prstGeom prst="rect">
             <a:avLst/>
@@ -5536,6 +6196,10 @@
           <a:lstStyle/>
           <a:p>
             <a:pPr algn="ctr"/>
+            <a:endParaRPr>
+              <a:latin typeface="NanumSquare Neo Regular" pitchFamily="2" charset="-127"/>
+              <a:ea typeface="NanumSquare Neo Regular" pitchFamily="2" charset="-127"/>
+            </a:endParaRPr>
           </a:p>
         </p:txBody>
       </p:sp>
@@ -5547,8 +6211,8 @@
         </p:nvSpPr>
         <p:spPr>
           <a:xfrm>
-            <a:off x="685800" y="6126480"/>
-            <a:ext cx="10881360" cy="384048"/>
+            <a:off x="685800" y="6255367"/>
+            <a:ext cx="10881360" cy="190821"/>
           </a:xfrm>
           <a:prstGeom prst="rect">
             <a:avLst/>
@@ -5556,7 +6220,7 @@
           <a:noFill/>
         </p:spPr>
         <p:txBody>
-          <a:bodyPr wrap="square" anchor="ctr" lIns="45720" rIns="45720" tIns="18288" bIns="18288">
+          <a:bodyPr wrap="square" lIns="45720" tIns="18288" rIns="45720" bIns="18288" anchor="ctr">
             <a:spAutoFit/>
           </a:bodyPr>
           <a:lstStyle/>
@@ -5567,25 +6231,462 @@
               </a:spcAft>
             </a:pPr>
             <a:r>
-              <a:rPr sz="1000" b="1">
+              <a:rPr sz="1000" b="1" dirty="0" err="1">
                 <a:solidFill>
                   <a:srgbClr val="243447"/>
                 </a:solidFill>
-                <a:latin typeface="Apple SD Gothic Neo"/>
-                <a:ea typeface="Apple SD Gothic Neo"/>
-              </a:rPr>
-              <a:t>수행 방식   </a:t>
-            </a:r>
-            <a:r>
-              <a:rPr sz="950" b="0">
+                <a:latin typeface="NanumSquare Neo Regular" pitchFamily="2" charset="-127"/>
+                <a:ea typeface="NanumSquare Neo Regular" pitchFamily="2" charset="-127"/>
+              </a:rPr>
+              <a:t>수행</a:t>
+            </a:r>
+            <a:r>
+              <a:rPr sz="1000" b="1" dirty="0">
+                <a:solidFill>
+                  <a:srgbClr val="243447"/>
+                </a:solidFill>
+                <a:latin typeface="NanumSquare Neo Regular" pitchFamily="2" charset="-127"/>
+                <a:ea typeface="NanumSquare Neo Regular" pitchFamily="2" charset="-127"/>
+              </a:rPr>
+              <a:t> </a:t>
+            </a:r>
+            <a:r>
+              <a:rPr sz="1000" b="1" dirty="0" err="1">
+                <a:solidFill>
+                  <a:srgbClr val="243447"/>
+                </a:solidFill>
+                <a:latin typeface="NanumSquare Neo Regular" pitchFamily="2" charset="-127"/>
+                <a:ea typeface="NanumSquare Neo Regular" pitchFamily="2" charset="-127"/>
+              </a:rPr>
+              <a:t>방식</a:t>
+            </a:r>
+            <a:r>
+              <a:rPr sz="1000" b="1" dirty="0">
+                <a:solidFill>
+                  <a:srgbClr val="243447"/>
+                </a:solidFill>
+                <a:latin typeface="NanumSquare Neo Regular" pitchFamily="2" charset="-127"/>
+                <a:ea typeface="NanumSquare Neo Regular" pitchFamily="2" charset="-127"/>
+              </a:rPr>
+              <a:t>   </a:t>
+            </a:r>
+            <a:r>
+              <a:rPr sz="950" b="0" dirty="0" err="1">
                 <a:solidFill>
                   <a:srgbClr val="262626"/>
                 </a:solidFill>
-                <a:latin typeface="Apple SD Gothic Neo"/>
-                <a:ea typeface="Apple SD Gothic Neo"/>
-              </a:rPr>
-              <a:t>귀행 검증체계 재현 → 동일 조건 확장 평가 → 개선 후보의 한계까지 투명 공유 — 확정 결과가 아닌 검증 단계의 후보는 반드시 구분해 보고</a:t>
-            </a:r>
+                <a:latin typeface="NanumSquare Neo Regular" pitchFamily="2" charset="-127"/>
+                <a:ea typeface="NanumSquare Neo Regular" pitchFamily="2" charset="-127"/>
+              </a:rPr>
+              <a:t>귀행</a:t>
+            </a:r>
+            <a:r>
+              <a:rPr sz="950" b="0" dirty="0">
+                <a:solidFill>
+                  <a:srgbClr val="262626"/>
+                </a:solidFill>
+                <a:latin typeface="NanumSquare Neo Regular" pitchFamily="2" charset="-127"/>
+                <a:ea typeface="NanumSquare Neo Regular" pitchFamily="2" charset="-127"/>
+              </a:rPr>
+              <a:t> </a:t>
+            </a:r>
+            <a:r>
+              <a:rPr sz="950" b="0" dirty="0" err="1">
+                <a:solidFill>
+                  <a:srgbClr val="262626"/>
+                </a:solidFill>
+                <a:latin typeface="NanumSquare Neo Regular" pitchFamily="2" charset="-127"/>
+                <a:ea typeface="NanumSquare Neo Regular" pitchFamily="2" charset="-127"/>
+              </a:rPr>
+              <a:t>검증체계</a:t>
+            </a:r>
+            <a:r>
+              <a:rPr sz="950" b="0" dirty="0">
+                <a:solidFill>
+                  <a:srgbClr val="262626"/>
+                </a:solidFill>
+                <a:latin typeface="NanumSquare Neo Regular" pitchFamily="2" charset="-127"/>
+                <a:ea typeface="NanumSquare Neo Regular" pitchFamily="2" charset="-127"/>
+              </a:rPr>
+              <a:t> </a:t>
+            </a:r>
+            <a:r>
+              <a:rPr sz="950" b="0" dirty="0" err="1">
+                <a:solidFill>
+                  <a:srgbClr val="262626"/>
+                </a:solidFill>
+                <a:latin typeface="NanumSquare Neo Regular" pitchFamily="2" charset="-127"/>
+                <a:ea typeface="NanumSquare Neo Regular" pitchFamily="2" charset="-127"/>
+              </a:rPr>
+              <a:t>재현</a:t>
+            </a:r>
+            <a:r>
+              <a:rPr sz="950" b="0" dirty="0">
+                <a:solidFill>
+                  <a:srgbClr val="262626"/>
+                </a:solidFill>
+                <a:latin typeface="NanumSquare Neo Regular" pitchFamily="2" charset="-127"/>
+                <a:ea typeface="NanumSquare Neo Regular" pitchFamily="2" charset="-127"/>
+              </a:rPr>
+              <a:t> → </a:t>
+            </a:r>
+            <a:r>
+              <a:rPr sz="950" b="0" dirty="0" err="1">
+                <a:solidFill>
+                  <a:srgbClr val="262626"/>
+                </a:solidFill>
+                <a:latin typeface="NanumSquare Neo Regular" pitchFamily="2" charset="-127"/>
+                <a:ea typeface="NanumSquare Neo Regular" pitchFamily="2" charset="-127"/>
+              </a:rPr>
+              <a:t>동일</a:t>
+            </a:r>
+            <a:r>
+              <a:rPr sz="950" b="0" dirty="0">
+                <a:solidFill>
+                  <a:srgbClr val="262626"/>
+                </a:solidFill>
+                <a:latin typeface="NanumSquare Neo Regular" pitchFamily="2" charset="-127"/>
+                <a:ea typeface="NanumSquare Neo Regular" pitchFamily="2" charset="-127"/>
+              </a:rPr>
+              <a:t> </a:t>
+            </a:r>
+            <a:r>
+              <a:rPr sz="950" b="0" dirty="0" err="1">
+                <a:solidFill>
+                  <a:srgbClr val="262626"/>
+                </a:solidFill>
+                <a:latin typeface="NanumSquare Neo Regular" pitchFamily="2" charset="-127"/>
+                <a:ea typeface="NanumSquare Neo Regular" pitchFamily="2" charset="-127"/>
+              </a:rPr>
+              <a:t>조건</a:t>
+            </a:r>
+            <a:r>
+              <a:rPr sz="950" b="0" dirty="0">
+                <a:solidFill>
+                  <a:srgbClr val="262626"/>
+                </a:solidFill>
+                <a:latin typeface="NanumSquare Neo Regular" pitchFamily="2" charset="-127"/>
+                <a:ea typeface="NanumSquare Neo Regular" pitchFamily="2" charset="-127"/>
+              </a:rPr>
+              <a:t> </a:t>
+            </a:r>
+            <a:r>
+              <a:rPr sz="950" b="0" dirty="0" err="1">
+                <a:solidFill>
+                  <a:srgbClr val="262626"/>
+                </a:solidFill>
+                <a:latin typeface="NanumSquare Neo Regular" pitchFamily="2" charset="-127"/>
+                <a:ea typeface="NanumSquare Neo Regular" pitchFamily="2" charset="-127"/>
+              </a:rPr>
+              <a:t>확장</a:t>
+            </a:r>
+            <a:r>
+              <a:rPr sz="950" b="0" dirty="0">
+                <a:solidFill>
+                  <a:srgbClr val="262626"/>
+                </a:solidFill>
+                <a:latin typeface="NanumSquare Neo Regular" pitchFamily="2" charset="-127"/>
+                <a:ea typeface="NanumSquare Neo Regular" pitchFamily="2" charset="-127"/>
+              </a:rPr>
+              <a:t> </a:t>
+            </a:r>
+            <a:r>
+              <a:rPr sz="950" b="0" dirty="0" err="1">
+                <a:solidFill>
+                  <a:srgbClr val="262626"/>
+                </a:solidFill>
+                <a:latin typeface="NanumSquare Neo Regular" pitchFamily="2" charset="-127"/>
+                <a:ea typeface="NanumSquare Neo Regular" pitchFamily="2" charset="-127"/>
+              </a:rPr>
+              <a:t>평가</a:t>
+            </a:r>
+            <a:r>
+              <a:rPr sz="950" b="0" dirty="0">
+                <a:solidFill>
+                  <a:srgbClr val="262626"/>
+                </a:solidFill>
+                <a:latin typeface="NanumSquare Neo Regular" pitchFamily="2" charset="-127"/>
+                <a:ea typeface="NanumSquare Neo Regular" pitchFamily="2" charset="-127"/>
+              </a:rPr>
+              <a:t> → </a:t>
+            </a:r>
+            <a:r>
+              <a:rPr sz="950" b="0" dirty="0" err="1">
+                <a:solidFill>
+                  <a:srgbClr val="262626"/>
+                </a:solidFill>
+                <a:latin typeface="NanumSquare Neo Regular" pitchFamily="2" charset="-127"/>
+                <a:ea typeface="NanumSquare Neo Regular" pitchFamily="2" charset="-127"/>
+              </a:rPr>
+              <a:t>개선</a:t>
+            </a:r>
+            <a:r>
+              <a:rPr sz="950" b="0" dirty="0">
+                <a:solidFill>
+                  <a:srgbClr val="262626"/>
+                </a:solidFill>
+                <a:latin typeface="NanumSquare Neo Regular" pitchFamily="2" charset="-127"/>
+                <a:ea typeface="NanumSquare Neo Regular" pitchFamily="2" charset="-127"/>
+              </a:rPr>
+              <a:t> </a:t>
+            </a:r>
+            <a:r>
+              <a:rPr sz="950" b="0" dirty="0" err="1">
+                <a:solidFill>
+                  <a:srgbClr val="262626"/>
+                </a:solidFill>
+                <a:latin typeface="NanumSquare Neo Regular" pitchFamily="2" charset="-127"/>
+                <a:ea typeface="NanumSquare Neo Regular" pitchFamily="2" charset="-127"/>
+              </a:rPr>
+              <a:t>후보의</a:t>
+            </a:r>
+            <a:r>
+              <a:rPr sz="950" b="0" dirty="0">
+                <a:solidFill>
+                  <a:srgbClr val="262626"/>
+                </a:solidFill>
+                <a:latin typeface="NanumSquare Neo Regular" pitchFamily="2" charset="-127"/>
+                <a:ea typeface="NanumSquare Neo Regular" pitchFamily="2" charset="-127"/>
+              </a:rPr>
+              <a:t> </a:t>
+            </a:r>
+            <a:r>
+              <a:rPr sz="950" b="0" dirty="0" err="1">
+                <a:solidFill>
+                  <a:srgbClr val="262626"/>
+                </a:solidFill>
+                <a:latin typeface="NanumSquare Neo Regular" pitchFamily="2" charset="-127"/>
+                <a:ea typeface="NanumSquare Neo Regular" pitchFamily="2" charset="-127"/>
+              </a:rPr>
+              <a:t>한계까지</a:t>
+            </a:r>
+            <a:r>
+              <a:rPr sz="950" b="0" dirty="0">
+                <a:solidFill>
+                  <a:srgbClr val="262626"/>
+                </a:solidFill>
+                <a:latin typeface="NanumSquare Neo Regular" pitchFamily="2" charset="-127"/>
+                <a:ea typeface="NanumSquare Neo Regular" pitchFamily="2" charset="-127"/>
+              </a:rPr>
+              <a:t> </a:t>
+            </a:r>
+            <a:r>
+              <a:rPr sz="950" b="0" dirty="0" err="1">
+                <a:solidFill>
+                  <a:srgbClr val="262626"/>
+                </a:solidFill>
+                <a:latin typeface="NanumSquare Neo Regular" pitchFamily="2" charset="-127"/>
+                <a:ea typeface="NanumSquare Neo Regular" pitchFamily="2" charset="-127"/>
+              </a:rPr>
+              <a:t>투명</a:t>
+            </a:r>
+            <a:r>
+              <a:rPr sz="950" b="0" dirty="0">
+                <a:solidFill>
+                  <a:srgbClr val="262626"/>
+                </a:solidFill>
+                <a:latin typeface="NanumSquare Neo Regular" pitchFamily="2" charset="-127"/>
+                <a:ea typeface="NanumSquare Neo Regular" pitchFamily="2" charset="-127"/>
+              </a:rPr>
+              <a:t> </a:t>
+            </a:r>
+            <a:r>
+              <a:rPr sz="950" b="0" dirty="0" err="1">
+                <a:solidFill>
+                  <a:srgbClr val="262626"/>
+                </a:solidFill>
+                <a:latin typeface="NanumSquare Neo Regular" pitchFamily="2" charset="-127"/>
+                <a:ea typeface="NanumSquare Neo Regular" pitchFamily="2" charset="-127"/>
+              </a:rPr>
+              <a:t>공유</a:t>
+            </a:r>
+            <a:r>
+              <a:rPr sz="950" b="0" dirty="0">
+                <a:solidFill>
+                  <a:srgbClr val="262626"/>
+                </a:solidFill>
+                <a:latin typeface="NanumSquare Neo Regular" pitchFamily="2" charset="-127"/>
+                <a:ea typeface="NanumSquare Neo Regular" pitchFamily="2" charset="-127"/>
+              </a:rPr>
+              <a:t> — </a:t>
+            </a:r>
+            <a:r>
+              <a:rPr sz="950" b="0" dirty="0" err="1">
+                <a:solidFill>
+                  <a:srgbClr val="262626"/>
+                </a:solidFill>
+                <a:latin typeface="NanumSquare Neo Regular" pitchFamily="2" charset="-127"/>
+                <a:ea typeface="NanumSquare Neo Regular" pitchFamily="2" charset="-127"/>
+              </a:rPr>
+              <a:t>확정</a:t>
+            </a:r>
+            <a:r>
+              <a:rPr sz="950" b="0" dirty="0">
+                <a:solidFill>
+                  <a:srgbClr val="262626"/>
+                </a:solidFill>
+                <a:latin typeface="NanumSquare Neo Regular" pitchFamily="2" charset="-127"/>
+                <a:ea typeface="NanumSquare Neo Regular" pitchFamily="2" charset="-127"/>
+              </a:rPr>
+              <a:t> </a:t>
+            </a:r>
+            <a:r>
+              <a:rPr sz="950" b="0" dirty="0" err="1">
+                <a:solidFill>
+                  <a:srgbClr val="262626"/>
+                </a:solidFill>
+                <a:latin typeface="NanumSquare Neo Regular" pitchFamily="2" charset="-127"/>
+                <a:ea typeface="NanumSquare Neo Regular" pitchFamily="2" charset="-127"/>
+              </a:rPr>
+              <a:t>결과가</a:t>
+            </a:r>
+            <a:r>
+              <a:rPr sz="950" b="0" dirty="0">
+                <a:solidFill>
+                  <a:srgbClr val="262626"/>
+                </a:solidFill>
+                <a:latin typeface="NanumSquare Neo Regular" pitchFamily="2" charset="-127"/>
+                <a:ea typeface="NanumSquare Neo Regular" pitchFamily="2" charset="-127"/>
+              </a:rPr>
+              <a:t> </a:t>
+            </a:r>
+            <a:r>
+              <a:rPr sz="950" b="0" dirty="0" err="1">
+                <a:solidFill>
+                  <a:srgbClr val="262626"/>
+                </a:solidFill>
+                <a:latin typeface="NanumSquare Neo Regular" pitchFamily="2" charset="-127"/>
+                <a:ea typeface="NanumSquare Neo Regular" pitchFamily="2" charset="-127"/>
+              </a:rPr>
+              <a:t>아닌</a:t>
+            </a:r>
+            <a:r>
+              <a:rPr sz="950" b="0" dirty="0">
+                <a:solidFill>
+                  <a:srgbClr val="262626"/>
+                </a:solidFill>
+                <a:latin typeface="NanumSquare Neo Regular" pitchFamily="2" charset="-127"/>
+                <a:ea typeface="NanumSquare Neo Regular" pitchFamily="2" charset="-127"/>
+              </a:rPr>
+              <a:t> </a:t>
+            </a:r>
+            <a:r>
+              <a:rPr sz="950" b="0" dirty="0" err="1">
+                <a:solidFill>
+                  <a:srgbClr val="262626"/>
+                </a:solidFill>
+                <a:latin typeface="NanumSquare Neo Regular" pitchFamily="2" charset="-127"/>
+                <a:ea typeface="NanumSquare Neo Regular" pitchFamily="2" charset="-127"/>
+              </a:rPr>
+              <a:t>검증</a:t>
+            </a:r>
+            <a:r>
+              <a:rPr sz="950" b="0" dirty="0">
+                <a:solidFill>
+                  <a:srgbClr val="262626"/>
+                </a:solidFill>
+                <a:latin typeface="NanumSquare Neo Regular" pitchFamily="2" charset="-127"/>
+                <a:ea typeface="NanumSquare Neo Regular" pitchFamily="2" charset="-127"/>
+              </a:rPr>
+              <a:t> </a:t>
+            </a:r>
+            <a:r>
+              <a:rPr sz="950" b="0" dirty="0" err="1">
+                <a:solidFill>
+                  <a:srgbClr val="262626"/>
+                </a:solidFill>
+                <a:latin typeface="NanumSquare Neo Regular" pitchFamily="2" charset="-127"/>
+                <a:ea typeface="NanumSquare Neo Regular" pitchFamily="2" charset="-127"/>
+              </a:rPr>
+              <a:t>단계의</a:t>
+            </a:r>
+            <a:r>
+              <a:rPr sz="950" b="0" dirty="0">
+                <a:solidFill>
+                  <a:srgbClr val="262626"/>
+                </a:solidFill>
+                <a:latin typeface="NanumSquare Neo Regular" pitchFamily="2" charset="-127"/>
+                <a:ea typeface="NanumSquare Neo Regular" pitchFamily="2" charset="-127"/>
+              </a:rPr>
+              <a:t> </a:t>
+            </a:r>
+            <a:r>
+              <a:rPr sz="950" b="0" dirty="0" err="1">
+                <a:solidFill>
+                  <a:srgbClr val="262626"/>
+                </a:solidFill>
+                <a:latin typeface="NanumSquare Neo Regular" pitchFamily="2" charset="-127"/>
+                <a:ea typeface="NanumSquare Neo Regular" pitchFamily="2" charset="-127"/>
+              </a:rPr>
+              <a:t>후보는</a:t>
+            </a:r>
+            <a:r>
+              <a:rPr sz="950" b="0" dirty="0">
+                <a:solidFill>
+                  <a:srgbClr val="262626"/>
+                </a:solidFill>
+                <a:latin typeface="NanumSquare Neo Regular" pitchFamily="2" charset="-127"/>
+                <a:ea typeface="NanumSquare Neo Regular" pitchFamily="2" charset="-127"/>
+              </a:rPr>
+              <a:t> </a:t>
+            </a:r>
+            <a:r>
+              <a:rPr sz="950" b="0" dirty="0" err="1">
+                <a:solidFill>
+                  <a:srgbClr val="262626"/>
+                </a:solidFill>
+                <a:latin typeface="NanumSquare Neo Regular" pitchFamily="2" charset="-127"/>
+                <a:ea typeface="NanumSquare Neo Regular" pitchFamily="2" charset="-127"/>
+              </a:rPr>
+              <a:t>반드시</a:t>
+            </a:r>
+            <a:r>
+              <a:rPr sz="950" b="0" dirty="0">
+                <a:solidFill>
+                  <a:srgbClr val="262626"/>
+                </a:solidFill>
+                <a:latin typeface="NanumSquare Neo Regular" pitchFamily="2" charset="-127"/>
+                <a:ea typeface="NanumSquare Neo Regular" pitchFamily="2" charset="-127"/>
+              </a:rPr>
+              <a:t> </a:t>
+            </a:r>
+            <a:r>
+              <a:rPr sz="950" b="0" dirty="0" err="1">
+                <a:solidFill>
+                  <a:srgbClr val="262626"/>
+                </a:solidFill>
+                <a:latin typeface="NanumSquare Neo Regular" pitchFamily="2" charset="-127"/>
+                <a:ea typeface="NanumSquare Neo Regular" pitchFamily="2" charset="-127"/>
+              </a:rPr>
+              <a:t>구분해</a:t>
+            </a:r>
+            <a:r>
+              <a:rPr sz="950" b="0" dirty="0">
+                <a:solidFill>
+                  <a:srgbClr val="262626"/>
+                </a:solidFill>
+                <a:latin typeface="NanumSquare Neo Regular" pitchFamily="2" charset="-127"/>
+                <a:ea typeface="NanumSquare Neo Regular" pitchFamily="2" charset="-127"/>
+              </a:rPr>
+              <a:t> </a:t>
+            </a:r>
+            <a:r>
+              <a:rPr sz="950" b="0" dirty="0" err="1">
+                <a:solidFill>
+                  <a:srgbClr val="262626"/>
+                </a:solidFill>
+                <a:latin typeface="NanumSquare Neo Regular" pitchFamily="2" charset="-127"/>
+                <a:ea typeface="NanumSquare Neo Regular" pitchFamily="2" charset="-127"/>
+              </a:rPr>
+              <a:t>보고</a:t>
+            </a:r>
+            <a:endParaRPr sz="950" b="0" dirty="0">
+              <a:solidFill>
+                <a:srgbClr val="262626"/>
+              </a:solidFill>
+              <a:latin typeface="NanumSquare Neo Regular" pitchFamily="2" charset="-127"/>
+              <a:ea typeface="NanumSquare Neo Regular" pitchFamily="2" charset="-127"/>
+            </a:endParaRPr>
           </a:p>
         </p:txBody>
       </p:sp>
